--- a/exports/pptx/lessons/senior-module-05-dot-addition/day-02-sutras.pptx
+++ b/exports/pptx/lessons/senior-module-05-dot-addition/day-02-sutras.pptx
@@ -14,9 +14,16 @@
     <p:sldId id="262" r:id="rId8"/>
     <p:sldId id="263" r:id="rId9"/>
     <p:sldId id="264" r:id="rId10"/>
+    <p:sldId id="265" r:id="rId11"/>
+    <p:sldId id="266" r:id="rId12"/>
+    <p:sldId id="267" r:id="rId13"/>
+    <p:sldId id="268" r:id="rId14"/>
+    <p:sldId id="269" r:id="rId15"/>
+    <p:sldId id="270" r:id="rId16"/>
+    <p:sldId id="271" r:id="rId17"/>
   </p:sldIdLst>
   <p:notesMasterIdLst>
-    <p:notesMasterId r:id="rId11"/>
+    <p:notesMasterId r:id="rId18"/>
   </p:notesMasterIdLst>
   <p:sldSz cx="9144000" cy="5143500"/>
   <p:notesSz cx="5143500" cy="9144000"/>
@@ -534,6 +541,622 @@
             <a:fld id="{F7021451-1387-4CA6-816F-3879F97B5CBC}" type="slidenum">
               <a:rPr lang="en-US"/>
               <a:t>1</a:t>
+            </a:fld>
+            <a:endParaRPr lang="en-US"/>
+          </a:p>
+        </p:txBody>
+      </p:sp>
+    </p:spTree>
+    <p:extLst>
+      <p:ext uri="{BB962C8B-B14F-4D97-AF65-F5344CB8AC3E}">
+        <p14:creationId xmlns:p14="http://schemas.microsoft.com/office/powerpoint/2010/main" val="1024086991"/>
+      </p:ext>
+    </p:extLst>
+  </p:cSld>
+  <p:clrMapOvr>
+    <a:masterClrMapping/>
+  </p:clrMapOvr>
+</p:notes>
+</file>
+
+<file path=ppt/notesSlides/notesSlide10.xml><?xml version="1.0" encoding="utf-8"?>
+<p:notes xmlns:a="http://schemas.openxmlformats.org/drawingml/2006/main" xmlns:r="http://schemas.openxmlformats.org/officeDocument/2006/relationships" xmlns:p="http://schemas.openxmlformats.org/presentationml/2006/main">
+  <p:cSld>
+    <p:spTree>
+      <p:nvGrpSpPr>
+        <p:cNvPr id="1" name=""/>
+        <p:cNvGrpSpPr/>
+        <p:nvPr/>
+      </p:nvGrpSpPr>
+      <p:grpSpPr>
+        <a:xfrm>
+          <a:off x="0" y="0"/>
+          <a:ext cx="0" cy="0"/>
+          <a:chOff x="0" y="0"/>
+          <a:chExt cx="0" cy="0"/>
+        </a:xfrm>
+      </p:grpSpPr>
+      <p:sp>
+        <p:nvSpPr>
+          <p:cNvPr id="2" name="Slide Image Placeholder 1"/>
+          <p:cNvSpPr>
+            <a:spLocks noGrp="1" noRot="1" noChangeAspect="1"/>
+          </p:cNvSpPr>
+          <p:nvPr>
+            <p:ph type="sldImg"/>
+          </p:nvPr>
+        </p:nvSpPr>
+        <p:spPr/>
+      </p:sp>
+      <p:sp>
+        <p:nvSpPr>
+          <p:cNvPr id="3" name="Notes Placeholder 2"/>
+          <p:cNvSpPr>
+            <a:spLocks noGrp="1"/>
+          </p:cNvSpPr>
+          <p:nvPr>
+            <p:ph type="body" idx="1"/>
+          </p:nvPr>
+        </p:nvSpPr>
+        <p:spPr/>
+        <p:txBody>
+          <a:bodyPr/>
+          <a:lstStyle/>
+          <a:p>
+            <a:r>
+              <a:rPr lang="en-US" dirty="0"/>
+              <a:t/>
+            </a:r>
+            <a:endParaRPr lang="en-US" dirty="0"/>
+          </a:p>
+        </p:txBody>
+      </p:sp>
+      <p:sp>
+        <p:nvSpPr>
+          <p:cNvPr id="4" name="Slide Number Placeholder 3"/>
+          <p:cNvSpPr>
+            <a:spLocks noGrp="1"/>
+          </p:cNvSpPr>
+          <p:nvPr>
+            <p:ph type="sldNum" sz="quarter" idx="10"/>
+          </p:nvPr>
+        </p:nvSpPr>
+        <p:spPr/>
+        <p:txBody>
+          <a:bodyPr/>
+          <a:lstStyle/>
+          <a:p>
+            <a:fld id="{F7021451-1387-4CA6-816F-3879F97B5CBC}" type="slidenum">
+              <a:rPr lang="en-US"/>
+              <a:t>10</a:t>
+            </a:fld>
+            <a:endParaRPr lang="en-US"/>
+          </a:p>
+        </p:txBody>
+      </p:sp>
+    </p:spTree>
+    <p:extLst>
+      <p:ext uri="{BB962C8B-B14F-4D97-AF65-F5344CB8AC3E}">
+        <p14:creationId xmlns:p14="http://schemas.microsoft.com/office/powerpoint/2010/main" val="1024086991"/>
+      </p:ext>
+    </p:extLst>
+  </p:cSld>
+  <p:clrMapOvr>
+    <a:masterClrMapping/>
+  </p:clrMapOvr>
+</p:notes>
+</file>
+
+<file path=ppt/notesSlides/notesSlide11.xml><?xml version="1.0" encoding="utf-8"?>
+<p:notes xmlns:a="http://schemas.openxmlformats.org/drawingml/2006/main" xmlns:r="http://schemas.openxmlformats.org/officeDocument/2006/relationships" xmlns:p="http://schemas.openxmlformats.org/presentationml/2006/main">
+  <p:cSld>
+    <p:spTree>
+      <p:nvGrpSpPr>
+        <p:cNvPr id="1" name=""/>
+        <p:cNvGrpSpPr/>
+        <p:nvPr/>
+      </p:nvGrpSpPr>
+      <p:grpSpPr>
+        <a:xfrm>
+          <a:off x="0" y="0"/>
+          <a:ext cx="0" cy="0"/>
+          <a:chOff x="0" y="0"/>
+          <a:chExt cx="0" cy="0"/>
+        </a:xfrm>
+      </p:grpSpPr>
+      <p:sp>
+        <p:nvSpPr>
+          <p:cNvPr id="2" name="Slide Image Placeholder 1"/>
+          <p:cNvSpPr>
+            <a:spLocks noGrp="1" noRot="1" noChangeAspect="1"/>
+          </p:cNvSpPr>
+          <p:nvPr>
+            <p:ph type="sldImg"/>
+          </p:nvPr>
+        </p:nvSpPr>
+        <p:spPr/>
+      </p:sp>
+      <p:sp>
+        <p:nvSpPr>
+          <p:cNvPr id="3" name="Notes Placeholder 2"/>
+          <p:cNvSpPr>
+            <a:spLocks noGrp="1"/>
+          </p:cNvSpPr>
+          <p:nvPr>
+            <p:ph type="body" idx="1"/>
+          </p:nvPr>
+        </p:nvSpPr>
+        <p:spPr/>
+        <p:txBody>
+          <a:bodyPr/>
+          <a:lstStyle/>
+          <a:p>
+            <a:r>
+              <a:rPr lang="en-US" dirty="0"/>
+              <a:t/>
+            </a:r>
+            <a:endParaRPr lang="en-US" dirty="0"/>
+          </a:p>
+        </p:txBody>
+      </p:sp>
+      <p:sp>
+        <p:nvSpPr>
+          <p:cNvPr id="4" name="Slide Number Placeholder 3"/>
+          <p:cNvSpPr>
+            <a:spLocks noGrp="1"/>
+          </p:cNvSpPr>
+          <p:nvPr>
+            <p:ph type="sldNum" sz="quarter" idx="10"/>
+          </p:nvPr>
+        </p:nvSpPr>
+        <p:spPr/>
+        <p:txBody>
+          <a:bodyPr/>
+          <a:lstStyle/>
+          <a:p>
+            <a:fld id="{F7021451-1387-4CA6-816F-3879F97B5CBC}" type="slidenum">
+              <a:rPr lang="en-US"/>
+              <a:t>11</a:t>
+            </a:fld>
+            <a:endParaRPr lang="en-US"/>
+          </a:p>
+        </p:txBody>
+      </p:sp>
+    </p:spTree>
+    <p:extLst>
+      <p:ext uri="{BB962C8B-B14F-4D97-AF65-F5344CB8AC3E}">
+        <p14:creationId xmlns:p14="http://schemas.microsoft.com/office/powerpoint/2010/main" val="1024086991"/>
+      </p:ext>
+    </p:extLst>
+  </p:cSld>
+  <p:clrMapOvr>
+    <a:masterClrMapping/>
+  </p:clrMapOvr>
+</p:notes>
+</file>
+
+<file path=ppt/notesSlides/notesSlide12.xml><?xml version="1.0" encoding="utf-8"?>
+<p:notes xmlns:a="http://schemas.openxmlformats.org/drawingml/2006/main" xmlns:r="http://schemas.openxmlformats.org/officeDocument/2006/relationships" xmlns:p="http://schemas.openxmlformats.org/presentationml/2006/main">
+  <p:cSld>
+    <p:spTree>
+      <p:nvGrpSpPr>
+        <p:cNvPr id="1" name=""/>
+        <p:cNvGrpSpPr/>
+        <p:nvPr/>
+      </p:nvGrpSpPr>
+      <p:grpSpPr>
+        <a:xfrm>
+          <a:off x="0" y="0"/>
+          <a:ext cx="0" cy="0"/>
+          <a:chOff x="0" y="0"/>
+          <a:chExt cx="0" cy="0"/>
+        </a:xfrm>
+      </p:grpSpPr>
+      <p:sp>
+        <p:nvSpPr>
+          <p:cNvPr id="2" name="Slide Image Placeholder 1"/>
+          <p:cNvSpPr>
+            <a:spLocks noGrp="1" noRot="1" noChangeAspect="1"/>
+          </p:cNvSpPr>
+          <p:nvPr>
+            <p:ph type="sldImg"/>
+          </p:nvPr>
+        </p:nvSpPr>
+        <p:spPr/>
+      </p:sp>
+      <p:sp>
+        <p:nvSpPr>
+          <p:cNvPr id="3" name="Notes Placeholder 2"/>
+          <p:cNvSpPr>
+            <a:spLocks noGrp="1"/>
+          </p:cNvSpPr>
+          <p:nvPr>
+            <p:ph type="body" idx="1"/>
+          </p:nvPr>
+        </p:nvSpPr>
+        <p:spPr/>
+        <p:txBody>
+          <a:bodyPr/>
+          <a:lstStyle/>
+          <a:p>
+            <a:r>
+              <a:rPr lang="en-US" dirty="0"/>
+              <a:t/>
+            </a:r>
+            <a:endParaRPr lang="en-US" dirty="0"/>
+          </a:p>
+        </p:txBody>
+      </p:sp>
+      <p:sp>
+        <p:nvSpPr>
+          <p:cNvPr id="4" name="Slide Number Placeholder 3"/>
+          <p:cNvSpPr>
+            <a:spLocks noGrp="1"/>
+          </p:cNvSpPr>
+          <p:nvPr>
+            <p:ph type="sldNum" sz="quarter" idx="10"/>
+          </p:nvPr>
+        </p:nvSpPr>
+        <p:spPr/>
+        <p:txBody>
+          <a:bodyPr/>
+          <a:lstStyle/>
+          <a:p>
+            <a:fld id="{F7021451-1387-4CA6-816F-3879F97B5CBC}" type="slidenum">
+              <a:rPr lang="en-US"/>
+              <a:t>12</a:t>
+            </a:fld>
+            <a:endParaRPr lang="en-US"/>
+          </a:p>
+        </p:txBody>
+      </p:sp>
+    </p:spTree>
+    <p:extLst>
+      <p:ext uri="{BB962C8B-B14F-4D97-AF65-F5344CB8AC3E}">
+        <p14:creationId xmlns:p14="http://schemas.microsoft.com/office/powerpoint/2010/main" val="1024086991"/>
+      </p:ext>
+    </p:extLst>
+  </p:cSld>
+  <p:clrMapOvr>
+    <a:masterClrMapping/>
+  </p:clrMapOvr>
+</p:notes>
+</file>
+
+<file path=ppt/notesSlides/notesSlide13.xml><?xml version="1.0" encoding="utf-8"?>
+<p:notes xmlns:a="http://schemas.openxmlformats.org/drawingml/2006/main" xmlns:r="http://schemas.openxmlformats.org/officeDocument/2006/relationships" xmlns:p="http://schemas.openxmlformats.org/presentationml/2006/main">
+  <p:cSld>
+    <p:spTree>
+      <p:nvGrpSpPr>
+        <p:cNvPr id="1" name=""/>
+        <p:cNvGrpSpPr/>
+        <p:nvPr/>
+      </p:nvGrpSpPr>
+      <p:grpSpPr>
+        <a:xfrm>
+          <a:off x="0" y="0"/>
+          <a:ext cx="0" cy="0"/>
+          <a:chOff x="0" y="0"/>
+          <a:chExt cx="0" cy="0"/>
+        </a:xfrm>
+      </p:grpSpPr>
+      <p:sp>
+        <p:nvSpPr>
+          <p:cNvPr id="2" name="Slide Image Placeholder 1"/>
+          <p:cNvSpPr>
+            <a:spLocks noGrp="1" noRot="1" noChangeAspect="1"/>
+          </p:cNvSpPr>
+          <p:nvPr>
+            <p:ph type="sldImg"/>
+          </p:nvPr>
+        </p:nvSpPr>
+        <p:spPr/>
+      </p:sp>
+      <p:sp>
+        <p:nvSpPr>
+          <p:cNvPr id="3" name="Notes Placeholder 2"/>
+          <p:cNvSpPr>
+            <a:spLocks noGrp="1"/>
+          </p:cNvSpPr>
+          <p:nvPr>
+            <p:ph type="body" idx="1"/>
+          </p:nvPr>
+        </p:nvSpPr>
+        <p:spPr/>
+        <p:txBody>
+          <a:bodyPr/>
+          <a:lstStyle/>
+          <a:p>
+            <a:r>
+              <a:rPr lang="en-US" dirty="0"/>
+              <a:t/>
+            </a:r>
+            <a:endParaRPr lang="en-US" dirty="0"/>
+          </a:p>
+        </p:txBody>
+      </p:sp>
+      <p:sp>
+        <p:nvSpPr>
+          <p:cNvPr id="4" name="Slide Number Placeholder 3"/>
+          <p:cNvSpPr>
+            <a:spLocks noGrp="1"/>
+          </p:cNvSpPr>
+          <p:nvPr>
+            <p:ph type="sldNum" sz="quarter" idx="10"/>
+          </p:nvPr>
+        </p:nvSpPr>
+        <p:spPr/>
+        <p:txBody>
+          <a:bodyPr/>
+          <a:lstStyle/>
+          <a:p>
+            <a:fld id="{F7021451-1387-4CA6-816F-3879F97B5CBC}" type="slidenum">
+              <a:rPr lang="en-US"/>
+              <a:t>13</a:t>
+            </a:fld>
+            <a:endParaRPr lang="en-US"/>
+          </a:p>
+        </p:txBody>
+      </p:sp>
+    </p:spTree>
+    <p:extLst>
+      <p:ext uri="{BB962C8B-B14F-4D97-AF65-F5344CB8AC3E}">
+        <p14:creationId xmlns:p14="http://schemas.microsoft.com/office/powerpoint/2010/main" val="1024086991"/>
+      </p:ext>
+    </p:extLst>
+  </p:cSld>
+  <p:clrMapOvr>
+    <a:masterClrMapping/>
+  </p:clrMapOvr>
+</p:notes>
+</file>
+
+<file path=ppt/notesSlides/notesSlide14.xml><?xml version="1.0" encoding="utf-8"?>
+<p:notes xmlns:a="http://schemas.openxmlformats.org/drawingml/2006/main" xmlns:r="http://schemas.openxmlformats.org/officeDocument/2006/relationships" xmlns:p="http://schemas.openxmlformats.org/presentationml/2006/main">
+  <p:cSld>
+    <p:spTree>
+      <p:nvGrpSpPr>
+        <p:cNvPr id="1" name=""/>
+        <p:cNvGrpSpPr/>
+        <p:nvPr/>
+      </p:nvGrpSpPr>
+      <p:grpSpPr>
+        <a:xfrm>
+          <a:off x="0" y="0"/>
+          <a:ext cx="0" cy="0"/>
+          <a:chOff x="0" y="0"/>
+          <a:chExt cx="0" cy="0"/>
+        </a:xfrm>
+      </p:grpSpPr>
+      <p:sp>
+        <p:nvSpPr>
+          <p:cNvPr id="2" name="Slide Image Placeholder 1"/>
+          <p:cNvSpPr>
+            <a:spLocks noGrp="1" noRot="1" noChangeAspect="1"/>
+          </p:cNvSpPr>
+          <p:nvPr>
+            <p:ph type="sldImg"/>
+          </p:nvPr>
+        </p:nvSpPr>
+        <p:spPr/>
+      </p:sp>
+      <p:sp>
+        <p:nvSpPr>
+          <p:cNvPr id="3" name="Notes Placeholder 2"/>
+          <p:cNvSpPr>
+            <a:spLocks noGrp="1"/>
+          </p:cNvSpPr>
+          <p:nvPr>
+            <p:ph type="body" idx="1"/>
+          </p:nvPr>
+        </p:nvSpPr>
+        <p:spPr/>
+        <p:txBody>
+          <a:bodyPr/>
+          <a:lstStyle/>
+          <a:p>
+            <a:r>
+              <a:rPr lang="en-US" dirty="0"/>
+              <a:t/>
+            </a:r>
+            <a:endParaRPr lang="en-US" dirty="0"/>
+          </a:p>
+        </p:txBody>
+      </p:sp>
+      <p:sp>
+        <p:nvSpPr>
+          <p:cNvPr id="4" name="Slide Number Placeholder 3"/>
+          <p:cNvSpPr>
+            <a:spLocks noGrp="1"/>
+          </p:cNvSpPr>
+          <p:nvPr>
+            <p:ph type="sldNum" sz="quarter" idx="10"/>
+          </p:nvPr>
+        </p:nvSpPr>
+        <p:spPr/>
+        <p:txBody>
+          <a:bodyPr/>
+          <a:lstStyle/>
+          <a:p>
+            <a:fld id="{F7021451-1387-4CA6-816F-3879F97B5CBC}" type="slidenum">
+              <a:rPr lang="en-US"/>
+              <a:t>14</a:t>
+            </a:fld>
+            <a:endParaRPr lang="en-US"/>
+          </a:p>
+        </p:txBody>
+      </p:sp>
+    </p:spTree>
+    <p:extLst>
+      <p:ext uri="{BB962C8B-B14F-4D97-AF65-F5344CB8AC3E}">
+        <p14:creationId xmlns:p14="http://schemas.microsoft.com/office/powerpoint/2010/main" val="1024086991"/>
+      </p:ext>
+    </p:extLst>
+  </p:cSld>
+  <p:clrMapOvr>
+    <a:masterClrMapping/>
+  </p:clrMapOvr>
+</p:notes>
+</file>
+
+<file path=ppt/notesSlides/notesSlide15.xml><?xml version="1.0" encoding="utf-8"?>
+<p:notes xmlns:a="http://schemas.openxmlformats.org/drawingml/2006/main" xmlns:r="http://schemas.openxmlformats.org/officeDocument/2006/relationships" xmlns:p="http://schemas.openxmlformats.org/presentationml/2006/main">
+  <p:cSld>
+    <p:spTree>
+      <p:nvGrpSpPr>
+        <p:cNvPr id="1" name=""/>
+        <p:cNvGrpSpPr/>
+        <p:nvPr/>
+      </p:nvGrpSpPr>
+      <p:grpSpPr>
+        <a:xfrm>
+          <a:off x="0" y="0"/>
+          <a:ext cx="0" cy="0"/>
+          <a:chOff x="0" y="0"/>
+          <a:chExt cx="0" cy="0"/>
+        </a:xfrm>
+      </p:grpSpPr>
+      <p:sp>
+        <p:nvSpPr>
+          <p:cNvPr id="2" name="Slide Image Placeholder 1"/>
+          <p:cNvSpPr>
+            <a:spLocks noGrp="1" noRot="1" noChangeAspect="1"/>
+          </p:cNvSpPr>
+          <p:nvPr>
+            <p:ph type="sldImg"/>
+          </p:nvPr>
+        </p:nvSpPr>
+        <p:spPr/>
+      </p:sp>
+      <p:sp>
+        <p:nvSpPr>
+          <p:cNvPr id="3" name="Notes Placeholder 2"/>
+          <p:cNvSpPr>
+            <a:spLocks noGrp="1"/>
+          </p:cNvSpPr>
+          <p:nvPr>
+            <p:ph type="body" idx="1"/>
+          </p:nvPr>
+        </p:nvSpPr>
+        <p:spPr/>
+        <p:txBody>
+          <a:bodyPr/>
+          <a:lstStyle/>
+          <a:p>
+            <a:r>
+              <a:rPr lang="en-US" dirty="0"/>
+              <a:t/>
+            </a:r>
+            <a:endParaRPr lang="en-US" dirty="0"/>
+          </a:p>
+        </p:txBody>
+      </p:sp>
+      <p:sp>
+        <p:nvSpPr>
+          <p:cNvPr id="4" name="Slide Number Placeholder 3"/>
+          <p:cNvSpPr>
+            <a:spLocks noGrp="1"/>
+          </p:cNvSpPr>
+          <p:nvPr>
+            <p:ph type="sldNum" sz="quarter" idx="10"/>
+          </p:nvPr>
+        </p:nvSpPr>
+        <p:spPr/>
+        <p:txBody>
+          <a:bodyPr/>
+          <a:lstStyle/>
+          <a:p>
+            <a:fld id="{F7021451-1387-4CA6-816F-3879F97B5CBC}" type="slidenum">
+              <a:rPr lang="en-US"/>
+              <a:t>15</a:t>
+            </a:fld>
+            <a:endParaRPr lang="en-US"/>
+          </a:p>
+        </p:txBody>
+      </p:sp>
+    </p:spTree>
+    <p:extLst>
+      <p:ext uri="{BB962C8B-B14F-4D97-AF65-F5344CB8AC3E}">
+        <p14:creationId xmlns:p14="http://schemas.microsoft.com/office/powerpoint/2010/main" val="1024086991"/>
+      </p:ext>
+    </p:extLst>
+  </p:cSld>
+  <p:clrMapOvr>
+    <a:masterClrMapping/>
+  </p:clrMapOvr>
+</p:notes>
+</file>
+
+<file path=ppt/notesSlides/notesSlide16.xml><?xml version="1.0" encoding="utf-8"?>
+<p:notes xmlns:a="http://schemas.openxmlformats.org/drawingml/2006/main" xmlns:r="http://schemas.openxmlformats.org/officeDocument/2006/relationships" xmlns:p="http://schemas.openxmlformats.org/presentationml/2006/main">
+  <p:cSld>
+    <p:spTree>
+      <p:nvGrpSpPr>
+        <p:cNvPr id="1" name=""/>
+        <p:cNvGrpSpPr/>
+        <p:nvPr/>
+      </p:nvGrpSpPr>
+      <p:grpSpPr>
+        <a:xfrm>
+          <a:off x="0" y="0"/>
+          <a:ext cx="0" cy="0"/>
+          <a:chOff x="0" y="0"/>
+          <a:chExt cx="0" cy="0"/>
+        </a:xfrm>
+      </p:grpSpPr>
+      <p:sp>
+        <p:nvSpPr>
+          <p:cNvPr id="2" name="Slide Image Placeholder 1"/>
+          <p:cNvSpPr>
+            <a:spLocks noGrp="1" noRot="1" noChangeAspect="1"/>
+          </p:cNvSpPr>
+          <p:nvPr>
+            <p:ph type="sldImg"/>
+          </p:nvPr>
+        </p:nvSpPr>
+        <p:spPr/>
+      </p:sp>
+      <p:sp>
+        <p:nvSpPr>
+          <p:cNvPr id="3" name="Notes Placeholder 2"/>
+          <p:cNvSpPr>
+            <a:spLocks noGrp="1"/>
+          </p:cNvSpPr>
+          <p:nvPr>
+            <p:ph type="body" idx="1"/>
+          </p:nvPr>
+        </p:nvSpPr>
+        <p:spPr/>
+        <p:txBody>
+          <a:bodyPr/>
+          <a:lstStyle/>
+          <a:p>
+            <a:r>
+              <a:rPr lang="en-US" dirty="0"/>
+              <a:t/>
+            </a:r>
+            <a:endParaRPr lang="en-US" dirty="0"/>
+          </a:p>
+        </p:txBody>
+      </p:sp>
+      <p:sp>
+        <p:nvSpPr>
+          <p:cNvPr id="4" name="Slide Number Placeholder 3"/>
+          <p:cNvSpPr>
+            <a:spLocks noGrp="1"/>
+          </p:cNvSpPr>
+          <p:nvPr>
+            <p:ph type="sldNum" sz="quarter" idx="10"/>
+          </p:nvPr>
+        </p:nvSpPr>
+        <p:spPr/>
+        <p:txBody>
+          <a:bodyPr/>
+          <a:lstStyle/>
+          <a:p>
+            <a:fld id="{F7021451-1387-4CA6-816F-3879F97B5CBC}" type="slidenum">
+              <a:rPr lang="en-US"/>
+              <a:t>16</a:t>
             </a:fld>
             <a:endParaRPr lang="en-US"/>
           </a:p>
@@ -1787,7 +2410,117 @@
         </p:nvSpPr>
         <p:spPr>
           <a:xfrm>
-            <a:off x="406301" y="1223963"/>
+            <a:off x="406301" y="4434929"/>
+            <a:ext cx="8498026" cy="213271"/>
+          </a:xfrm>
+          <a:prstGeom prst="rect">
+            <a:avLst/>
+          </a:prstGeom>
+          <a:noFill/>
+          <a:ln/>
+        </p:spPr>
+        <p:txBody>
+          <a:bodyPr wrap="square" lIns="0" tIns="0" rIns="0" bIns="0" rtlCol="0" anchor="t"/>
+          <a:lstStyle/>
+          <a:p>
+            <a:pPr algn="l" indent="0" marL="0">
+              <a:lnSpc>
+                <a:spcPts val="1680"/>
+              </a:lnSpc>
+              <a:spcBef>
+                <a:spcPts val="300"/>
+              </a:spcBef>
+              <a:spcAft>
+                <a:spcPts val="300"/>
+              </a:spcAft>
+              <a:buNone/>
+            </a:pPr>
+            <a:r>
+              <a:rPr lang="en-US" sz="1200" dirty="0">
+                <a:solidFill>
+                  <a:srgbClr val="1A1A1A"/>
+                </a:solidFill>
+                <a:latin typeface="Georgia" pitchFamily="34" charset="0"/>
+                <a:ea typeface="Georgia" pitchFamily="34" charset="-122"/>
+                <a:cs typeface="Georgia" pitchFamily="34" charset="-120"/>
+              </a:rPr>
+              <a:t>Senior ·  · IKS Curriculum</a:t>
+            </a:r>
+            <a:endParaRPr lang="en-US" sz="1200" dirty="0"/>
+          </a:p>
+        </p:txBody>
+      </p:sp>
+    </p:spTree>
+  </p:cSld>
+  <p:clrMapOvr>
+    <a:masterClrMapping/>
+  </p:clrMapOvr>
+</p:sld>
+</file>
+
+<file path=ppt/slides/slide10.xml><?xml version="1.0" encoding="utf-8"?>
+<p:sld xmlns:a="http://schemas.openxmlformats.org/drawingml/2006/main" xmlns:r="http://schemas.openxmlformats.org/officeDocument/2006/relationships" xmlns:p="http://schemas.openxmlformats.org/presentationml/2006/main">
+  <p:cSld name="Slide 10">
+    <p:bg>
+      <p:bgPr>
+        <a:solidFill>
+          <a:srgbClr val="FAF7F2"/>
+        </a:solidFill>
+      </p:bgPr>
+    </p:bg>
+    <p:spTree>
+      <p:nvGrpSpPr>
+        <p:cNvPr id="1" name=""/>
+        <p:cNvGrpSpPr/>
+        <p:nvPr/>
+      </p:nvGrpSpPr>
+      <p:grpSpPr>
+        <a:xfrm>
+          <a:off x="0" y="0"/>
+          <a:ext cx="0" cy="0"/>
+          <a:chOff x="0" y="0"/>
+          <a:chExt cx="0" cy="0"/>
+        </a:xfrm>
+      </p:grpSpPr>
+      <p:sp>
+        <p:nvSpPr>
+          <p:cNvPr id="2" name="Text 0"/>
+          <p:cNvSpPr/>
+          <p:nvPr/>
+        </p:nvSpPr>
+        <p:spPr>
+          <a:xfrm>
+            <a:off x="0" y="0"/>
+            <a:ext cx="9144000" cy="101501"/>
+          </a:xfrm>
+          <a:prstGeom prst="rect">
+            <a:avLst/>
+          </a:prstGeom>
+          <a:solidFill>
+            <a:srgbClr val="5D1D2E"/>
+          </a:solidFill>
+          <a:ln/>
+        </p:spPr>
+        <p:txBody>
+          <a:bodyPr wrap="square" rtlCol="0" anchor="ctr"/>
+          <a:lstStyle/>
+          <a:p>
+            <a:pPr indent="0" marL="0">
+              <a:buNone/>
+            </a:pPr>
+            <a:endParaRPr lang="en-US" dirty="0"/>
+          </a:p>
+        </p:txBody>
+      </p:sp>
+      <p:sp>
+        <p:nvSpPr>
+          <p:cNvPr id="3" name="Text 1"/>
+          <p:cNvSpPr/>
+          <p:nvPr/>
+        </p:nvSpPr>
+        <p:spPr>
+          <a:xfrm>
+            <a:off x="406301" y="457051"/>
             <a:ext cx="8498026" cy="274290"/>
           </a:xfrm>
           <a:prstGeom prst="rect">
@@ -1821,9 +2554,183 @@
                 <a:ea typeface="Times New Roman" pitchFamily="34" charset="-122"/>
                 <a:cs typeface="Times New Roman" pitchFamily="34" charset="-120"/>
               </a:rPr>
-              <a:t>Learning objective</a:t>
+              <a:t>Core (25 min) (cont.)</a:t>
             </a:r>
             <a:endParaRPr lang="en-US" sz="1800" dirty="0"/>
+          </a:p>
+        </p:txBody>
+      </p:sp>
+      <p:sp>
+        <p:nvSpPr>
+          <p:cNvPr id="4" name="Text 2"/>
+          <p:cNvSpPr/>
+          <p:nvPr/>
+        </p:nvSpPr>
+        <p:spPr>
+          <a:xfrm>
+            <a:off x="634901" y="883593"/>
+            <a:ext cx="8102798" cy="281880"/>
+          </a:xfrm>
+          <a:prstGeom prst="rect">
+            <a:avLst/>
+          </a:prstGeom>
+          <a:noFill/>
+          <a:ln/>
+        </p:spPr>
+        <p:txBody>
+          <a:bodyPr wrap="square" lIns="0" tIns="0" rIns="0" bIns="0" rtlCol="0" anchor="t"/>
+          <a:lstStyle/>
+          <a:p>
+            <a:pPr algn="l" marL="342900" indent="-342900">
+              <a:lnSpc>
+                <a:spcPts val="1620"/>
+              </a:lnSpc>
+              <a:spcAft>
+                <a:spcPts val="300"/>
+              </a:spcAft>
+              <a:buSzPct val="100000"/>
+              <a:buChar char="•"/>
+            </a:pPr>
+            <a:r>
+              <a:rPr lang="en-US" sz="1200" b="1" dirty="0">
+                <a:solidFill>
+                  <a:srgbClr val="1A1A1A"/>
+                </a:solidFill>
+                <a:latin typeface="Georgia" pitchFamily="34" charset="0"/>
+                <a:ea typeface="Georgia" pitchFamily="34" charset="-122"/>
+                <a:cs typeface="Georgia" pitchFamily="34" charset="-120"/>
+              </a:rPr>
+              <a:t>The two sūtras most relevant to addition:</a:t>
+            </a:r>
+            <a:endParaRPr lang="en-US" sz="1200" dirty="0"/>
+          </a:p>
+        </p:txBody>
+      </p:sp>
+      <p:sp>
+        <p:nvSpPr>
+          <p:cNvPr id="5" name="Text 3"/>
+          <p:cNvSpPr/>
+          <p:nvPr/>
+        </p:nvSpPr>
+        <p:spPr>
+          <a:xfrm>
+            <a:off x="634901" y="1266974"/>
+            <a:ext cx="8102798" cy="937022"/>
+          </a:xfrm>
+          <a:prstGeom prst="rect">
+            <a:avLst/>
+          </a:prstGeom>
+          <a:noFill/>
+          <a:ln/>
+        </p:spPr>
+        <p:txBody>
+          <a:bodyPr wrap="square" lIns="0" tIns="0" rIns="0" bIns="0" rtlCol="0" anchor="t"/>
+          <a:lstStyle/>
+          <a:p>
+            <a:pPr algn="l" marL="342900" indent="-342900">
+              <a:lnSpc>
+                <a:spcPts val="1620"/>
+              </a:lnSpc>
+              <a:spcAft>
+                <a:spcPts val="300"/>
+              </a:spcAft>
+              <a:buSzPct val="100000"/>
+              <a:buChar char="•"/>
+            </a:pPr>
+            <a:pPr algn="l" indent="0" marL="0">
+              <a:lnSpc>
+                <a:spcPts val="1620"/>
+              </a:lnSpc>
+              <a:spcAft>
+                <a:spcPts val="300"/>
+              </a:spcAft>
+              <a:buNone/>
+            </a:pPr>
+            <a:r>
+              <a:rPr lang="en-US" sz="1200" i="1" dirty="0">
+                <a:solidFill>
+                  <a:srgbClr val="1A1A1A"/>
+                </a:solidFill>
+                <a:latin typeface="Georgia" pitchFamily="34" charset="0"/>
+                <a:ea typeface="Georgia" pitchFamily="34" charset="-122"/>
+                <a:cs typeface="Georgia" pitchFamily="34" charset="-120"/>
+              </a:rPr>
+              <a:t>#7</a:t>
+            </a:r>
+            <a:pPr algn="l" indent="0" marL="0">
+              <a:lnSpc>
+                <a:spcPts val="1620"/>
+              </a:lnSpc>
+              <a:spcAft>
+                <a:spcPts val="300"/>
+              </a:spcAft>
+              <a:buNone/>
+            </a:pPr>
+            <a:r>
+              <a:rPr lang="en-US" sz="1200" dirty="0">
+                <a:solidFill>
+                  <a:srgbClr val="1A1A1A"/>
+                </a:solidFill>
+                <a:latin typeface="Georgia" pitchFamily="34" charset="0"/>
+                <a:ea typeface="Georgia" pitchFamily="34" charset="-122"/>
+                <a:cs typeface="Georgia" pitchFamily="34" charset="-120"/>
+              </a:rPr>
+              <a:t>Sankalana Vyavakalanābhyām*** — "by addition and by subtraction" — the basis of the "add 10, subtract 1" trick (Day 4).</a:t>
+            </a:r>
+            <a:endParaRPr lang="en-US" sz="1200" dirty="0"/>
+          </a:p>
+          <a:p>
+            <a:pPr algn="l" marL="342900" indent="-342900">
+              <a:lnSpc>
+                <a:spcPts val="1620"/>
+              </a:lnSpc>
+              <a:spcAft>
+                <a:spcPts val="300"/>
+              </a:spcAft>
+              <a:buSzPct val="100000"/>
+              <a:buChar char="•"/>
+            </a:pPr>
+            <a:pPr algn="l" indent="0" marL="0">
+              <a:lnSpc>
+                <a:spcPts val="1620"/>
+              </a:lnSpc>
+              <a:spcAft>
+                <a:spcPts val="300"/>
+              </a:spcAft>
+              <a:buNone/>
+            </a:pPr>
+            <a:r>
+              <a:rPr lang="en-US" sz="1200" i="1" dirty="0">
+                <a:solidFill>
+                  <a:srgbClr val="1A1A1A"/>
+                </a:solidFill>
+                <a:latin typeface="Georgia" pitchFamily="34" charset="0"/>
+                <a:ea typeface="Georgia" pitchFamily="34" charset="-122"/>
+                <a:cs typeface="Georgia" pitchFamily="34" charset="-120"/>
+              </a:rPr>
+              <a:t>#8</a:t>
+            </a:r>
+            <a:pPr algn="l" indent="0" marL="0">
+              <a:lnSpc>
+                <a:spcPts val="1620"/>
+              </a:lnSpc>
+              <a:spcAft>
+                <a:spcPts val="300"/>
+              </a:spcAft>
+              <a:buNone/>
+            </a:pPr>
+            <a:r>
+              <a:rPr lang="en-US" sz="1200" dirty="0">
+                <a:solidFill>
+                  <a:srgbClr val="1A1A1A"/>
+                </a:solidFill>
+                <a:latin typeface="Georgia" pitchFamily="34" charset="0"/>
+                <a:ea typeface="Georgia" pitchFamily="34" charset="-122"/>
+                <a:cs typeface="Georgia" pitchFamily="34" charset="-120"/>
+              </a:rPr>
+              <a:t>Pūraṇāpūraṇābhyām*** — "by completing or non-completing" — the basis of "scan a column for completions to 10" (the dot method's core insight).</a:t>
+            </a:r>
+            <a:endParaRPr lang="en-US" sz="1200" dirty="0"/>
           </a:p>
         </p:txBody>
       </p:sp>
@@ -1835,7 +2742,7 @@
         </p:nvSpPr>
         <p:spPr>
           <a:xfrm>
-            <a:off x="406301" y="1637854"/>
+            <a:off x="406301" y="4434929"/>
             <a:ext cx="8498026" cy="213271"/>
           </a:xfrm>
           <a:prstGeom prst="rect">
@@ -1869,15 +2776,1531 @@
                 <a:ea typeface="Georgia" pitchFamily="34" charset="-122"/>
                 <a:cs typeface="Georgia" pitchFamily="34" charset="-120"/>
               </a:rPr>
-              <a:t>Students name all 16 Tirthaji sūtras + 13 sub-sūtras and gloss the meaning of at least 5.</a:t>
+              <a:t>Senior ·  · IKS Curriculum</a:t>
             </a:r>
             <a:endParaRPr lang="en-US" sz="1200" dirty="0"/>
           </a:p>
         </p:txBody>
       </p:sp>
-      <p:sp>
-        <p:nvSpPr>
-          <p:cNvPr id="7" name="Text 5"/>
+    </p:spTree>
+  </p:cSld>
+  <p:clrMapOvr>
+    <a:masterClrMapping/>
+  </p:clrMapOvr>
+</p:sld>
+</file>
+
+<file path=ppt/slides/slide11.xml><?xml version="1.0" encoding="utf-8"?>
+<p:sld xmlns:a="http://schemas.openxmlformats.org/drawingml/2006/main" xmlns:r="http://schemas.openxmlformats.org/officeDocument/2006/relationships" xmlns:p="http://schemas.openxmlformats.org/presentationml/2006/main">
+  <p:cSld name="Slide 11">
+    <p:bg>
+      <p:bgPr>
+        <a:solidFill>
+          <a:srgbClr val="FAF7F2"/>
+        </a:solidFill>
+      </p:bgPr>
+    </p:bg>
+    <p:spTree>
+      <p:nvGrpSpPr>
+        <p:cNvPr id="1" name=""/>
+        <p:cNvGrpSpPr/>
+        <p:nvPr/>
+      </p:nvGrpSpPr>
+      <p:grpSpPr>
+        <a:xfrm>
+          <a:off x="0" y="0"/>
+          <a:ext cx="0" cy="0"/>
+          <a:chOff x="0" y="0"/>
+          <a:chExt cx="0" cy="0"/>
+        </a:xfrm>
+      </p:grpSpPr>
+      <p:sp>
+        <p:nvSpPr>
+          <p:cNvPr id="2" name="Text 0"/>
+          <p:cNvSpPr/>
+          <p:nvPr/>
+        </p:nvSpPr>
+        <p:spPr>
+          <a:xfrm>
+            <a:off x="0" y="0"/>
+            <a:ext cx="9144000" cy="101501"/>
+          </a:xfrm>
+          <a:prstGeom prst="rect">
+            <a:avLst/>
+          </a:prstGeom>
+          <a:solidFill>
+            <a:srgbClr val="5D1D2E"/>
+          </a:solidFill>
+          <a:ln/>
+        </p:spPr>
+        <p:txBody>
+          <a:bodyPr wrap="square" rtlCol="0" anchor="ctr"/>
+          <a:lstStyle/>
+          <a:p>
+            <a:pPr indent="0" marL="0">
+              <a:buNone/>
+            </a:pPr>
+            <a:endParaRPr lang="en-US" dirty="0"/>
+          </a:p>
+        </p:txBody>
+      </p:sp>
+      <p:sp>
+        <p:nvSpPr>
+          <p:cNvPr id="3" name="Text 1"/>
+          <p:cNvSpPr/>
+          <p:nvPr/>
+        </p:nvSpPr>
+        <p:spPr>
+          <a:xfrm>
+            <a:off x="406301" y="457051"/>
+            <a:ext cx="8498026" cy="274290"/>
+          </a:xfrm>
+          <a:prstGeom prst="rect">
+            <a:avLst/>
+          </a:prstGeom>
+          <a:noFill/>
+          <a:ln/>
+        </p:spPr>
+        <p:txBody>
+          <a:bodyPr wrap="square" lIns="0" tIns="0" rIns="0" bIns="0" rtlCol="0" anchor="t"/>
+          <a:lstStyle/>
+          <a:p>
+            <a:pPr algn="l" indent="0" marL="0">
+              <a:lnSpc>
+                <a:spcPts val="2160"/>
+              </a:lnSpc>
+              <a:spcBef>
+                <a:spcPts val="600"/>
+              </a:spcBef>
+              <a:spcAft>
+                <a:spcPts val="800"/>
+              </a:spcAft>
+              <a:buNone/>
+            </a:pPr>
+            <a:r>
+              <a:rPr lang="en-US" sz="1800" b="1" dirty="0">
+                <a:solidFill>
+                  <a:srgbClr val="997929"/>
+                </a:solidFill>
+                <a:latin typeface="Times New Roman" pitchFamily="34" charset="0"/>
+                <a:ea typeface="Times New Roman" pitchFamily="34" charset="-122"/>
+                <a:cs typeface="Times New Roman" pitchFamily="34" charset="-120"/>
+              </a:rPr>
+              <a:t>Core (25 min) (cont.)</a:t>
+            </a:r>
+            <a:endParaRPr lang="en-US" sz="1800" dirty="0"/>
+          </a:p>
+        </p:txBody>
+      </p:sp>
+      <p:sp>
+        <p:nvSpPr>
+          <p:cNvPr id="4" name="Text 2"/>
+          <p:cNvSpPr/>
+          <p:nvPr/>
+        </p:nvSpPr>
+        <p:spPr>
+          <a:xfrm>
+            <a:off x="634901" y="883593"/>
+            <a:ext cx="8102798" cy="487561"/>
+          </a:xfrm>
+          <a:prstGeom prst="rect">
+            <a:avLst/>
+          </a:prstGeom>
+          <a:noFill/>
+          <a:ln/>
+        </p:spPr>
+        <p:txBody>
+          <a:bodyPr wrap="square" lIns="0" tIns="0" rIns="0" bIns="0" rtlCol="0" anchor="t"/>
+          <a:lstStyle/>
+          <a:p>
+            <a:pPr algn="l" marL="342900" indent="-342900">
+              <a:lnSpc>
+                <a:spcPts val="1620"/>
+              </a:lnSpc>
+              <a:spcAft>
+                <a:spcPts val="300"/>
+              </a:spcAft>
+              <a:buSzPct val="100000"/>
+              <a:buChar char="•"/>
+            </a:pPr>
+            <a:r>
+              <a:rPr lang="en-US" sz="1200" b="1" dirty="0">
+                <a:solidFill>
+                  <a:srgbClr val="1A1A1A"/>
+                </a:solidFill>
+                <a:latin typeface="Georgia" pitchFamily="34" charset="0"/>
+                <a:ea typeface="Georgia" pitchFamily="34" charset="-122"/>
+                <a:cs typeface="Georgia" pitchFamily="34" charset="-120"/>
+              </a:rPr>
+              <a:t>The dot method itself is NOT one of the 16 sūtras.</a:t>
+            </a:r>
+            <a:pPr algn="l" indent="0" marL="0">
+              <a:lnSpc>
+                <a:spcPts val="1620"/>
+              </a:lnSpc>
+              <a:spcAft>
+                <a:spcPts val="300"/>
+              </a:spcAft>
+              <a:buNone/>
+            </a:pPr>
+            <a:r>
+              <a:rPr lang="en-US" sz="1200" dirty="0">
+                <a:solidFill>
+                  <a:srgbClr val="1A1A1A"/>
+                </a:solidFill>
+                <a:latin typeface="Georgia" pitchFamily="34" charset="0"/>
+                <a:ea typeface="Georgia" pitchFamily="34" charset="-122"/>
+                <a:cs typeface="Georgia" pitchFamily="34" charset="-120"/>
+              </a:rPr>
+              <a:t> It is a pedagogical technique that </a:t>
+            </a:r>
+            <a:pPr algn="l" indent="0" marL="0">
+              <a:lnSpc>
+                <a:spcPts val="1620"/>
+              </a:lnSpc>
+              <a:spcAft>
+                <a:spcPts val="300"/>
+              </a:spcAft>
+              <a:buNone/>
+            </a:pPr>
+            <a:r>
+              <a:rPr lang="en-US" sz="1200" i="1" dirty="0">
+                <a:solidFill>
+                  <a:srgbClr val="1A1A1A"/>
+                </a:solidFill>
+                <a:latin typeface="Georgia" pitchFamily="34" charset="0"/>
+                <a:ea typeface="Georgia" pitchFamily="34" charset="-122"/>
+                <a:cs typeface="Georgia" pitchFamily="34" charset="-120"/>
+              </a:rPr>
+              <a:t>uses</a:t>
+            </a:r>
+            <a:pPr algn="l" indent="0" marL="0">
+              <a:lnSpc>
+                <a:spcPts val="1620"/>
+              </a:lnSpc>
+              <a:spcAft>
+                <a:spcPts val="300"/>
+              </a:spcAft>
+              <a:buNone/>
+            </a:pPr>
+            <a:r>
+              <a:rPr lang="en-US" sz="1200" dirty="0">
+                <a:solidFill>
+                  <a:srgbClr val="1A1A1A"/>
+                </a:solidFill>
+                <a:latin typeface="Georgia" pitchFamily="34" charset="0"/>
+                <a:ea typeface="Georgia" pitchFamily="34" charset="-122"/>
+                <a:cs typeface="Georgia" pitchFamily="34" charset="-120"/>
+              </a:rPr>
+              <a:t> the spirit of sūtras 7 and 8. (Important to be honest about this; it comes back on Day 6.)</a:t>
+            </a:r>
+            <a:endParaRPr lang="en-US" sz="1200" dirty="0"/>
+          </a:p>
+        </p:txBody>
+      </p:sp>
+      <p:sp>
+        <p:nvSpPr>
+          <p:cNvPr id="5" name="Text 3"/>
+          <p:cNvSpPr/>
+          <p:nvPr/>
+        </p:nvSpPr>
+        <p:spPr>
+          <a:xfrm>
+            <a:off x="406301" y="4434929"/>
+            <a:ext cx="8498026" cy="213271"/>
+          </a:xfrm>
+          <a:prstGeom prst="rect">
+            <a:avLst/>
+          </a:prstGeom>
+          <a:noFill/>
+          <a:ln/>
+        </p:spPr>
+        <p:txBody>
+          <a:bodyPr wrap="square" lIns="0" tIns="0" rIns="0" bIns="0" rtlCol="0" anchor="t"/>
+          <a:lstStyle/>
+          <a:p>
+            <a:pPr algn="l" indent="0" marL="0">
+              <a:lnSpc>
+                <a:spcPts val="1680"/>
+              </a:lnSpc>
+              <a:spcBef>
+                <a:spcPts val="300"/>
+              </a:spcBef>
+              <a:spcAft>
+                <a:spcPts val="300"/>
+              </a:spcAft>
+              <a:buNone/>
+            </a:pPr>
+            <a:r>
+              <a:rPr lang="en-US" sz="1200" dirty="0">
+                <a:solidFill>
+                  <a:srgbClr val="1A1A1A"/>
+                </a:solidFill>
+                <a:latin typeface="Georgia" pitchFamily="34" charset="0"/>
+                <a:ea typeface="Georgia" pitchFamily="34" charset="-122"/>
+                <a:cs typeface="Georgia" pitchFamily="34" charset="-120"/>
+              </a:rPr>
+              <a:t>Senior ·  · IKS Curriculum</a:t>
+            </a:r>
+            <a:endParaRPr lang="en-US" sz="1200" dirty="0"/>
+          </a:p>
+        </p:txBody>
+      </p:sp>
+    </p:spTree>
+  </p:cSld>
+  <p:clrMapOvr>
+    <a:masterClrMapping/>
+  </p:clrMapOvr>
+</p:sld>
+</file>
+
+<file path=ppt/slides/slide12.xml><?xml version="1.0" encoding="utf-8"?>
+<p:sld xmlns:a="http://schemas.openxmlformats.org/drawingml/2006/main" xmlns:r="http://schemas.openxmlformats.org/officeDocument/2006/relationships" xmlns:p="http://schemas.openxmlformats.org/presentationml/2006/main">
+  <p:cSld name="Slide 12">
+    <p:bg>
+      <p:bgPr>
+        <a:solidFill>
+          <a:srgbClr val="FAF7F2"/>
+        </a:solidFill>
+      </p:bgPr>
+    </p:bg>
+    <p:spTree>
+      <p:nvGrpSpPr>
+        <p:cNvPr id="1" name=""/>
+        <p:cNvGrpSpPr/>
+        <p:nvPr/>
+      </p:nvGrpSpPr>
+      <p:grpSpPr>
+        <a:xfrm>
+          <a:off x="0" y="0"/>
+          <a:ext cx="0" cy="0"/>
+          <a:chOff x="0" y="0"/>
+          <a:chExt cx="0" cy="0"/>
+        </a:xfrm>
+      </p:grpSpPr>
+      <p:sp>
+        <p:nvSpPr>
+          <p:cNvPr id="2" name="Text 0"/>
+          <p:cNvSpPr/>
+          <p:nvPr/>
+        </p:nvSpPr>
+        <p:spPr>
+          <a:xfrm>
+            <a:off x="0" y="0"/>
+            <a:ext cx="9144000" cy="101501"/>
+          </a:xfrm>
+          <a:prstGeom prst="rect">
+            <a:avLst/>
+          </a:prstGeom>
+          <a:solidFill>
+            <a:srgbClr val="5D1D2E"/>
+          </a:solidFill>
+          <a:ln/>
+        </p:spPr>
+        <p:txBody>
+          <a:bodyPr wrap="square" rtlCol="0" anchor="ctr"/>
+          <a:lstStyle/>
+          <a:p>
+            <a:pPr indent="0" marL="0">
+              <a:buNone/>
+            </a:pPr>
+            <a:endParaRPr lang="en-US" dirty="0"/>
+          </a:p>
+        </p:txBody>
+      </p:sp>
+      <p:sp>
+        <p:nvSpPr>
+          <p:cNvPr id="3" name="Text 1"/>
+          <p:cNvSpPr/>
+          <p:nvPr/>
+        </p:nvSpPr>
+        <p:spPr>
+          <a:xfrm>
+            <a:off x="406301" y="457051"/>
+            <a:ext cx="8498026" cy="274290"/>
+          </a:xfrm>
+          <a:prstGeom prst="rect">
+            <a:avLst/>
+          </a:prstGeom>
+          <a:noFill/>
+          <a:ln/>
+        </p:spPr>
+        <p:txBody>
+          <a:bodyPr wrap="square" lIns="0" tIns="0" rIns="0" bIns="0" rtlCol="0" anchor="t"/>
+          <a:lstStyle/>
+          <a:p>
+            <a:pPr algn="l" indent="0" marL="0">
+              <a:lnSpc>
+                <a:spcPts val="2160"/>
+              </a:lnSpc>
+              <a:spcBef>
+                <a:spcPts val="600"/>
+              </a:spcBef>
+              <a:spcAft>
+                <a:spcPts val="800"/>
+              </a:spcAft>
+              <a:buNone/>
+            </a:pPr>
+            <a:r>
+              <a:rPr lang="en-US" sz="1800" b="1" dirty="0">
+                <a:solidFill>
+                  <a:srgbClr val="997929"/>
+                </a:solidFill>
+                <a:latin typeface="Times New Roman" pitchFamily="34" charset="0"/>
+                <a:ea typeface="Times New Roman" pitchFamily="34" charset="-122"/>
+                <a:cs typeface="Times New Roman" pitchFamily="34" charset="-120"/>
+              </a:rPr>
+              <a:t>Sūtra-recall quiz (10 min)</a:t>
+            </a:r>
+            <a:endParaRPr lang="en-US" sz="1800" dirty="0"/>
+          </a:p>
+        </p:txBody>
+      </p:sp>
+      <p:sp>
+        <p:nvSpPr>
+          <p:cNvPr id="4" name="Text 2"/>
+          <p:cNvSpPr/>
+          <p:nvPr/>
+        </p:nvSpPr>
+        <p:spPr>
+          <a:xfrm>
+            <a:off x="634901" y="883593"/>
+            <a:ext cx="8102798" cy="1013222"/>
+          </a:xfrm>
+          <a:prstGeom prst="rect">
+            <a:avLst/>
+          </a:prstGeom>
+          <a:noFill/>
+          <a:ln/>
+        </p:spPr>
+        <p:txBody>
+          <a:bodyPr wrap="square" lIns="0" tIns="0" rIns="0" bIns="0" rtlCol="0" anchor="t"/>
+          <a:lstStyle/>
+          <a:p>
+            <a:pPr algn="l" marL="342900" indent="-342900">
+              <a:lnSpc>
+                <a:spcPts val="1620"/>
+              </a:lnSpc>
+              <a:spcAft>
+                <a:spcPts val="300"/>
+              </a:spcAft>
+              <a:buSzPct val="100000"/>
+              <a:buChar char="•"/>
+            </a:pPr>
+            <a:r>
+              <a:rPr lang="en-US" sz="1200" dirty="0">
+                <a:solidFill>
+                  <a:srgbClr val="1A1A1A"/>
+                </a:solidFill>
+                <a:latin typeface="Georgia" pitchFamily="34" charset="0"/>
+                <a:ea typeface="Georgia" pitchFamily="34" charset="-122"/>
+                <a:cs typeface="Georgia" pitchFamily="34" charset="-120"/>
+              </a:rPr>
+              <a:t>8 single-mark questions on the back of the worksheet:</a:t>
+            </a:r>
+            <a:endParaRPr lang="en-US" sz="1200" dirty="0"/>
+          </a:p>
+          <a:p>
+            <a:pPr algn="l" marL="342900" indent="-342900">
+              <a:lnSpc>
+                <a:spcPts val="1620"/>
+              </a:lnSpc>
+              <a:spcAft>
+                <a:spcPts val="300"/>
+              </a:spcAft>
+              <a:buSzPct val="100000"/>
+              <a:buChar char="•"/>
+            </a:pPr>
+            <a:r>
+              <a:rPr lang="en-US" sz="1200" dirty="0">
+                <a:solidFill>
+                  <a:srgbClr val="1A1A1A"/>
+                </a:solidFill>
+                <a:latin typeface="Georgia" pitchFamily="34" charset="0"/>
+                <a:ea typeface="Georgia" pitchFamily="34" charset="-122"/>
+                <a:cs typeface="Georgia" pitchFamily="34" charset="-120"/>
+              </a:rPr>
+              <a:t>Match 6 sūtras to their English meanings.</a:t>
+            </a:r>
+            <a:endParaRPr lang="en-US" sz="1200" dirty="0"/>
+          </a:p>
+          <a:p>
+            <a:pPr algn="l" marL="342900" indent="-342900">
+              <a:lnSpc>
+                <a:spcPts val="1620"/>
+              </a:lnSpc>
+              <a:spcAft>
+                <a:spcPts val="300"/>
+              </a:spcAft>
+              <a:buSzPct val="100000"/>
+              <a:buChar char="•"/>
+            </a:pPr>
+            <a:r>
+              <a:rPr lang="en-US" sz="1200" dirty="0">
+                <a:solidFill>
+                  <a:srgbClr val="1A1A1A"/>
+                </a:solidFill>
+                <a:latin typeface="Georgia" pitchFamily="34" charset="0"/>
+                <a:ea typeface="Georgia" pitchFamily="34" charset="-122"/>
+                <a:cs typeface="Georgia" pitchFamily="34" charset="-120"/>
+              </a:rPr>
+              <a:t>"Which sūtra means 'vertically and crosswise'?"</a:t>
+            </a:r>
+            <a:endParaRPr lang="en-US" sz="1200" dirty="0"/>
+          </a:p>
+          <a:p>
+            <a:pPr algn="l" marL="342900" indent="-342900">
+              <a:lnSpc>
+                <a:spcPts val="1620"/>
+              </a:lnSpc>
+              <a:spcAft>
+                <a:spcPts val="300"/>
+              </a:spcAft>
+              <a:buSzPct val="100000"/>
+              <a:buChar char="•"/>
+            </a:pPr>
+            <a:r>
+              <a:rPr lang="en-US" sz="1200" dirty="0">
+                <a:solidFill>
+                  <a:srgbClr val="1A1A1A"/>
+                </a:solidFill>
+                <a:latin typeface="Georgia" pitchFamily="34" charset="0"/>
+                <a:ea typeface="Georgia" pitchFamily="34" charset="-122"/>
+                <a:cs typeface="Georgia" pitchFamily="34" charset="-120"/>
+              </a:rPr>
+              <a:t>"Which 2 sūtras are most relevant to addition?"</a:t>
+            </a:r>
+            <a:endParaRPr lang="en-US" sz="1200" dirty="0"/>
+          </a:p>
+        </p:txBody>
+      </p:sp>
+      <p:sp>
+        <p:nvSpPr>
+          <p:cNvPr id="5" name="Text 3"/>
+          <p:cNvSpPr/>
+          <p:nvPr/>
+        </p:nvSpPr>
+        <p:spPr>
+          <a:xfrm>
+            <a:off x="406301" y="4434929"/>
+            <a:ext cx="8498026" cy="213271"/>
+          </a:xfrm>
+          <a:prstGeom prst="rect">
+            <a:avLst/>
+          </a:prstGeom>
+          <a:noFill/>
+          <a:ln/>
+        </p:spPr>
+        <p:txBody>
+          <a:bodyPr wrap="square" lIns="0" tIns="0" rIns="0" bIns="0" rtlCol="0" anchor="t"/>
+          <a:lstStyle/>
+          <a:p>
+            <a:pPr algn="l" indent="0" marL="0">
+              <a:lnSpc>
+                <a:spcPts val="1680"/>
+              </a:lnSpc>
+              <a:spcBef>
+                <a:spcPts val="300"/>
+              </a:spcBef>
+              <a:spcAft>
+                <a:spcPts val="300"/>
+              </a:spcAft>
+              <a:buNone/>
+            </a:pPr>
+            <a:r>
+              <a:rPr lang="en-US" sz="1200" dirty="0">
+                <a:solidFill>
+                  <a:srgbClr val="1A1A1A"/>
+                </a:solidFill>
+                <a:latin typeface="Georgia" pitchFamily="34" charset="0"/>
+                <a:ea typeface="Georgia" pitchFamily="34" charset="-122"/>
+                <a:cs typeface="Georgia" pitchFamily="34" charset="-120"/>
+              </a:rPr>
+              <a:t>Senior ·  · IKS Curriculum</a:t>
+            </a:r>
+            <a:endParaRPr lang="en-US" sz="1200" dirty="0"/>
+          </a:p>
+        </p:txBody>
+      </p:sp>
+    </p:spTree>
+  </p:cSld>
+  <p:clrMapOvr>
+    <a:masterClrMapping/>
+  </p:clrMapOvr>
+</p:sld>
+</file>
+
+<file path=ppt/slides/slide13.xml><?xml version="1.0" encoding="utf-8"?>
+<p:sld xmlns:a="http://schemas.openxmlformats.org/drawingml/2006/main" xmlns:r="http://schemas.openxmlformats.org/officeDocument/2006/relationships" xmlns:p="http://schemas.openxmlformats.org/presentationml/2006/main">
+  <p:cSld name="Slide 13">
+    <p:bg>
+      <p:bgPr>
+        <a:solidFill>
+          <a:srgbClr val="FAF7F2"/>
+        </a:solidFill>
+      </p:bgPr>
+    </p:bg>
+    <p:spTree>
+      <p:nvGrpSpPr>
+        <p:cNvPr id="1" name=""/>
+        <p:cNvGrpSpPr/>
+        <p:nvPr/>
+      </p:nvGrpSpPr>
+      <p:grpSpPr>
+        <a:xfrm>
+          <a:off x="0" y="0"/>
+          <a:ext cx="0" cy="0"/>
+          <a:chOff x="0" y="0"/>
+          <a:chExt cx="0" cy="0"/>
+        </a:xfrm>
+      </p:grpSpPr>
+      <p:sp>
+        <p:nvSpPr>
+          <p:cNvPr id="2" name="Text 0"/>
+          <p:cNvSpPr/>
+          <p:nvPr/>
+        </p:nvSpPr>
+        <p:spPr>
+          <a:xfrm>
+            <a:off x="0" y="0"/>
+            <a:ext cx="9144000" cy="101501"/>
+          </a:xfrm>
+          <a:prstGeom prst="rect">
+            <a:avLst/>
+          </a:prstGeom>
+          <a:solidFill>
+            <a:srgbClr val="5D1D2E"/>
+          </a:solidFill>
+          <a:ln/>
+        </p:spPr>
+        <p:txBody>
+          <a:bodyPr wrap="square" rtlCol="0" anchor="ctr"/>
+          <a:lstStyle/>
+          <a:p>
+            <a:pPr indent="0" marL="0">
+              <a:buNone/>
+            </a:pPr>
+            <a:endParaRPr lang="en-US" dirty="0"/>
+          </a:p>
+        </p:txBody>
+      </p:sp>
+      <p:sp>
+        <p:nvSpPr>
+          <p:cNvPr id="3" name="Text 1"/>
+          <p:cNvSpPr/>
+          <p:nvPr/>
+        </p:nvSpPr>
+        <p:spPr>
+          <a:xfrm>
+            <a:off x="406301" y="457051"/>
+            <a:ext cx="8498026" cy="274290"/>
+          </a:xfrm>
+          <a:prstGeom prst="rect">
+            <a:avLst/>
+          </a:prstGeom>
+          <a:noFill/>
+          <a:ln/>
+        </p:spPr>
+        <p:txBody>
+          <a:bodyPr wrap="square" lIns="0" tIns="0" rIns="0" bIns="0" rtlCol="0" anchor="t"/>
+          <a:lstStyle/>
+          <a:p>
+            <a:pPr algn="l" indent="0" marL="0">
+              <a:lnSpc>
+                <a:spcPts val="2160"/>
+              </a:lnSpc>
+              <a:spcBef>
+                <a:spcPts val="600"/>
+              </a:spcBef>
+              <a:spcAft>
+                <a:spcPts val="800"/>
+              </a:spcAft>
+              <a:buNone/>
+            </a:pPr>
+            <a:r>
+              <a:rPr lang="en-US" sz="1800" b="1" dirty="0">
+                <a:solidFill>
+                  <a:srgbClr val="997929"/>
+                </a:solidFill>
+                <a:latin typeface="Times New Roman" pitchFamily="34" charset="0"/>
+                <a:ea typeface="Times New Roman" pitchFamily="34" charset="-122"/>
+                <a:cs typeface="Times New Roman" pitchFamily="34" charset="-120"/>
+              </a:rPr>
+              <a:t>Wrap-up (5 min)</a:t>
+            </a:r>
+            <a:endParaRPr lang="en-US" sz="1800" dirty="0"/>
+          </a:p>
+        </p:txBody>
+      </p:sp>
+      <p:sp>
+        <p:nvSpPr>
+          <p:cNvPr id="4" name="Text 2"/>
+          <p:cNvSpPr/>
+          <p:nvPr/>
+        </p:nvSpPr>
+        <p:spPr>
+          <a:xfrm>
+            <a:off x="634901" y="883593"/>
+            <a:ext cx="8102798" cy="281880"/>
+          </a:xfrm>
+          <a:prstGeom prst="rect">
+            <a:avLst/>
+          </a:prstGeom>
+          <a:noFill/>
+          <a:ln/>
+        </p:spPr>
+        <p:txBody>
+          <a:bodyPr wrap="square" lIns="0" tIns="0" rIns="0" bIns="0" rtlCol="0" anchor="t"/>
+          <a:lstStyle/>
+          <a:p>
+            <a:pPr algn="l" marL="342900" indent="-342900">
+              <a:lnSpc>
+                <a:spcPts val="1620"/>
+              </a:lnSpc>
+              <a:spcAft>
+                <a:spcPts val="300"/>
+              </a:spcAft>
+              <a:buSzPct val="100000"/>
+              <a:buChar char="•"/>
+            </a:pPr>
+            <a:r>
+              <a:rPr lang="en-US" sz="1200" dirty="0">
+                <a:solidFill>
+                  <a:srgbClr val="1A1A1A"/>
+                </a:solidFill>
+                <a:latin typeface="Georgia" pitchFamily="34" charset="0"/>
+                <a:ea typeface="Georgia" pitchFamily="34" charset="-122"/>
+                <a:cs typeface="Georgia" pitchFamily="34" charset="-120"/>
+              </a:rPr>
+              <a:t>Preview Day 3: </a:t>
+            </a:r>
+            <a:pPr algn="l" indent="0" marL="0">
+              <a:lnSpc>
+                <a:spcPts val="1620"/>
+              </a:lnSpc>
+              <a:spcAft>
+                <a:spcPts val="300"/>
+              </a:spcAft>
+              <a:buNone/>
+            </a:pPr>
+            <a:r>
+              <a:rPr lang="en-US" sz="1200" i="1" dirty="0">
+                <a:solidFill>
+                  <a:srgbClr val="1A1A1A"/>
+                </a:solidFill>
+                <a:latin typeface="Georgia" pitchFamily="34" charset="0"/>
+                <a:ea typeface="Georgia" pitchFamily="34" charset="-122"/>
+                <a:cs typeface="Georgia" pitchFamily="34" charset="-120"/>
+              </a:rPr>
+              <a:t>"Tomorrow — full dot-method at Senior level. 5-digit × 5-addend, sub-60-second target."</a:t>
+            </a:r>
+            <a:endParaRPr lang="en-US" sz="1200" dirty="0"/>
+          </a:p>
+        </p:txBody>
+      </p:sp>
+      <p:sp>
+        <p:nvSpPr>
+          <p:cNvPr id="5" name="Text 3"/>
+          <p:cNvSpPr/>
+          <p:nvPr/>
+        </p:nvSpPr>
+        <p:spPr>
+          <a:xfrm>
+            <a:off x="406301" y="4434929"/>
+            <a:ext cx="8498026" cy="213271"/>
+          </a:xfrm>
+          <a:prstGeom prst="rect">
+            <a:avLst/>
+          </a:prstGeom>
+          <a:noFill/>
+          <a:ln/>
+        </p:spPr>
+        <p:txBody>
+          <a:bodyPr wrap="square" lIns="0" tIns="0" rIns="0" bIns="0" rtlCol="0" anchor="t"/>
+          <a:lstStyle/>
+          <a:p>
+            <a:pPr algn="l" indent="0" marL="0">
+              <a:lnSpc>
+                <a:spcPts val="1680"/>
+              </a:lnSpc>
+              <a:spcBef>
+                <a:spcPts val="300"/>
+              </a:spcBef>
+              <a:spcAft>
+                <a:spcPts val="300"/>
+              </a:spcAft>
+              <a:buNone/>
+            </a:pPr>
+            <a:r>
+              <a:rPr lang="en-US" sz="1200" dirty="0">
+                <a:solidFill>
+                  <a:srgbClr val="1A1A1A"/>
+                </a:solidFill>
+                <a:latin typeface="Georgia" pitchFamily="34" charset="0"/>
+                <a:ea typeface="Georgia" pitchFamily="34" charset="-122"/>
+                <a:cs typeface="Georgia" pitchFamily="34" charset="-120"/>
+              </a:rPr>
+              <a:t>Senior ·  · IKS Curriculum</a:t>
+            </a:r>
+            <a:endParaRPr lang="en-US" sz="1200" dirty="0"/>
+          </a:p>
+        </p:txBody>
+      </p:sp>
+    </p:spTree>
+  </p:cSld>
+  <p:clrMapOvr>
+    <a:masterClrMapping/>
+  </p:clrMapOvr>
+</p:sld>
+</file>
+
+<file path=ppt/slides/slide14.xml><?xml version="1.0" encoding="utf-8"?>
+<p:sld xmlns:a="http://schemas.openxmlformats.org/drawingml/2006/main" xmlns:r="http://schemas.openxmlformats.org/officeDocument/2006/relationships" xmlns:p="http://schemas.openxmlformats.org/presentationml/2006/main">
+  <p:cSld name="Slide 14">
+    <p:bg>
+      <p:bgPr>
+        <a:solidFill>
+          <a:srgbClr val="FAF7F2"/>
+        </a:solidFill>
+      </p:bgPr>
+    </p:bg>
+    <p:spTree>
+      <p:nvGrpSpPr>
+        <p:cNvPr id="1" name=""/>
+        <p:cNvGrpSpPr/>
+        <p:nvPr/>
+      </p:nvGrpSpPr>
+      <p:grpSpPr>
+        <a:xfrm>
+          <a:off x="0" y="0"/>
+          <a:ext cx="0" cy="0"/>
+          <a:chOff x="0" y="0"/>
+          <a:chExt cx="0" cy="0"/>
+        </a:xfrm>
+      </p:grpSpPr>
+      <p:sp>
+        <p:nvSpPr>
+          <p:cNvPr id="2" name="Text 0"/>
+          <p:cNvSpPr/>
+          <p:nvPr/>
+        </p:nvSpPr>
+        <p:spPr>
+          <a:xfrm>
+            <a:off x="0" y="0"/>
+            <a:ext cx="9144000" cy="101501"/>
+          </a:xfrm>
+          <a:prstGeom prst="rect">
+            <a:avLst/>
+          </a:prstGeom>
+          <a:solidFill>
+            <a:srgbClr val="5D1D2E"/>
+          </a:solidFill>
+          <a:ln/>
+        </p:spPr>
+        <p:txBody>
+          <a:bodyPr wrap="square" rtlCol="0" anchor="ctr"/>
+          <a:lstStyle/>
+          <a:p>
+            <a:pPr indent="0" marL="0">
+              <a:buNone/>
+            </a:pPr>
+            <a:endParaRPr lang="en-US" dirty="0"/>
+          </a:p>
+        </p:txBody>
+      </p:sp>
+      <p:sp>
+        <p:nvSpPr>
+          <p:cNvPr id="3" name="Text 1"/>
+          <p:cNvSpPr/>
+          <p:nvPr/>
+        </p:nvSpPr>
+        <p:spPr>
+          <a:xfrm>
+            <a:off x="406301" y="457051"/>
+            <a:ext cx="8498026" cy="274290"/>
+          </a:xfrm>
+          <a:prstGeom prst="rect">
+            <a:avLst/>
+          </a:prstGeom>
+          <a:noFill/>
+          <a:ln/>
+        </p:spPr>
+        <p:txBody>
+          <a:bodyPr wrap="square" lIns="0" tIns="0" rIns="0" bIns="0" rtlCol="0" anchor="t"/>
+          <a:lstStyle/>
+          <a:p>
+            <a:pPr algn="l" indent="0" marL="0">
+              <a:lnSpc>
+                <a:spcPts val="2160"/>
+              </a:lnSpc>
+              <a:spcBef>
+                <a:spcPts val="600"/>
+              </a:spcBef>
+              <a:spcAft>
+                <a:spcPts val="800"/>
+              </a:spcAft>
+              <a:buNone/>
+            </a:pPr>
+            <a:r>
+              <a:rPr lang="en-US" sz="1800" b="1" dirty="0">
+                <a:solidFill>
+                  <a:srgbClr val="997929"/>
+                </a:solidFill>
+                <a:latin typeface="Times New Roman" pitchFamily="34" charset="0"/>
+                <a:ea typeface="Times New Roman" pitchFamily="34" charset="-122"/>
+                <a:cs typeface="Times New Roman" pitchFamily="34" charset="-120"/>
+              </a:rPr>
+              <a:t>Differentiation</a:t>
+            </a:r>
+            <a:endParaRPr lang="en-US" sz="1800" dirty="0"/>
+          </a:p>
+        </p:txBody>
+      </p:sp>
+      <p:sp>
+        <p:nvSpPr>
+          <p:cNvPr id="4" name="Text 2"/>
+          <p:cNvSpPr/>
+          <p:nvPr/>
+        </p:nvSpPr>
+        <p:spPr>
+          <a:xfrm>
+            <a:off x="634901" y="883593"/>
+            <a:ext cx="8102798" cy="731341"/>
+          </a:xfrm>
+          <a:prstGeom prst="rect">
+            <a:avLst/>
+          </a:prstGeom>
+          <a:noFill/>
+          <a:ln/>
+        </p:spPr>
+        <p:txBody>
+          <a:bodyPr wrap="square" lIns="0" tIns="0" rIns="0" bIns="0" rtlCol="0" anchor="t"/>
+          <a:lstStyle/>
+          <a:p>
+            <a:pPr algn="l" marL="342900" indent="-342900">
+              <a:lnSpc>
+                <a:spcPts val="1620"/>
+              </a:lnSpc>
+              <a:spcAft>
+                <a:spcPts val="300"/>
+              </a:spcAft>
+              <a:buSzPct val="100000"/>
+              <a:buChar char="•"/>
+            </a:pPr>
+            <a:r>
+              <a:rPr lang="en-US" sz="1200" b="1" dirty="0">
+                <a:solidFill>
+                  <a:srgbClr val="1A1A1A"/>
+                </a:solidFill>
+                <a:latin typeface="Georgia" pitchFamily="34" charset="0"/>
+                <a:ea typeface="Georgia" pitchFamily="34" charset="-122"/>
+                <a:cs typeface="Georgia" pitchFamily="34" charset="-120"/>
+              </a:rPr>
+              <a:t>Tier up:</a:t>
+            </a:r>
+            <a:pPr algn="l" indent="0" marL="0">
+              <a:lnSpc>
+                <a:spcPts val="1620"/>
+              </a:lnSpc>
+              <a:spcAft>
+                <a:spcPts val="300"/>
+              </a:spcAft>
+              <a:buNone/>
+            </a:pPr>
+            <a:r>
+              <a:rPr lang="en-US" sz="1200" dirty="0">
+                <a:solidFill>
+                  <a:srgbClr val="1A1A1A"/>
+                </a:solidFill>
+                <a:latin typeface="Georgia" pitchFamily="34" charset="0"/>
+                <a:ea typeface="Georgia" pitchFamily="34" charset="-122"/>
+                <a:cs typeface="Georgia" pitchFamily="34" charset="-120"/>
+              </a:rPr>
+              <a:t> Pick a sūtra (say, </a:t>
+            </a:r>
+            <a:pPr algn="l" indent="0" marL="0">
+              <a:lnSpc>
+                <a:spcPts val="1620"/>
+              </a:lnSpc>
+              <a:spcAft>
+                <a:spcPts val="300"/>
+              </a:spcAft>
+              <a:buNone/>
+            </a:pPr>
+            <a:r>
+              <a:rPr lang="en-US" sz="1200" i="1" dirty="0">
+                <a:solidFill>
+                  <a:srgbClr val="1A1A1A"/>
+                </a:solidFill>
+                <a:latin typeface="Georgia" pitchFamily="34" charset="0"/>
+                <a:ea typeface="Georgia" pitchFamily="34" charset="-122"/>
+                <a:cs typeface="Georgia" pitchFamily="34" charset="-120"/>
+              </a:rPr>
+              <a:t>Ūrdhva-Tiryagbhyām</a:t>
+            </a:r>
+            <a:pPr algn="l" indent="0" marL="0">
+              <a:lnSpc>
+                <a:spcPts val="1620"/>
+              </a:lnSpc>
+              <a:spcAft>
+                <a:spcPts val="300"/>
+              </a:spcAft>
+              <a:buNone/>
+            </a:pPr>
+            <a:r>
+              <a:rPr lang="en-US" sz="1200" dirty="0">
+                <a:solidFill>
+                  <a:srgbClr val="1A1A1A"/>
+                </a:solidFill>
+                <a:latin typeface="Georgia" pitchFamily="34" charset="0"/>
+                <a:ea typeface="Georgia" pitchFamily="34" charset="-122"/>
+                <a:cs typeface="Georgia" pitchFamily="34" charset="-120"/>
+              </a:rPr>
+              <a:t>) and look up its multiplication application. Bring a worked example on Day 4.</a:t>
+            </a:r>
+            <a:endParaRPr lang="en-US" sz="1200" dirty="0"/>
+          </a:p>
+          <a:p>
+            <a:pPr algn="l" marL="342900" indent="-342900">
+              <a:lnSpc>
+                <a:spcPts val="1620"/>
+              </a:lnSpc>
+              <a:spcAft>
+                <a:spcPts val="300"/>
+              </a:spcAft>
+              <a:buSzPct val="100000"/>
+              <a:buChar char="•"/>
+            </a:pPr>
+            <a:r>
+              <a:rPr lang="en-US" sz="1200" b="1" dirty="0">
+                <a:solidFill>
+                  <a:srgbClr val="1A1A1A"/>
+                </a:solidFill>
+                <a:latin typeface="Georgia" pitchFamily="34" charset="0"/>
+                <a:ea typeface="Georgia" pitchFamily="34" charset="-122"/>
+                <a:cs typeface="Georgia" pitchFamily="34" charset="-120"/>
+              </a:rPr>
+              <a:t>Tier down:</a:t>
+            </a:r>
+            <a:pPr algn="l" indent="0" marL="0">
+              <a:lnSpc>
+                <a:spcPts val="1620"/>
+              </a:lnSpc>
+              <a:spcAft>
+                <a:spcPts val="300"/>
+              </a:spcAft>
+              <a:buNone/>
+            </a:pPr>
+            <a:r>
+              <a:rPr lang="en-US" sz="1200" dirty="0">
+                <a:solidFill>
+                  <a:srgbClr val="1A1A1A"/>
+                </a:solidFill>
+                <a:latin typeface="Georgia" pitchFamily="34" charset="0"/>
+                <a:ea typeface="Georgia" pitchFamily="34" charset="-122"/>
+                <a:cs typeface="Georgia" pitchFamily="34" charset="-120"/>
+              </a:rPr>
+              <a:t> Focus on memorising the names of sūtras 1, 2, 3, 7, 8 — the most commonly used.</a:t>
+            </a:r>
+            <a:endParaRPr lang="en-US" sz="1200" dirty="0"/>
+          </a:p>
+        </p:txBody>
+      </p:sp>
+      <p:sp>
+        <p:nvSpPr>
+          <p:cNvPr id="5" name="Text 3"/>
+          <p:cNvSpPr/>
+          <p:nvPr/>
+        </p:nvSpPr>
+        <p:spPr>
+          <a:xfrm>
+            <a:off x="406301" y="4434929"/>
+            <a:ext cx="8498026" cy="213271"/>
+          </a:xfrm>
+          <a:prstGeom prst="rect">
+            <a:avLst/>
+          </a:prstGeom>
+          <a:noFill/>
+          <a:ln/>
+        </p:spPr>
+        <p:txBody>
+          <a:bodyPr wrap="square" lIns="0" tIns="0" rIns="0" bIns="0" rtlCol="0" anchor="t"/>
+          <a:lstStyle/>
+          <a:p>
+            <a:pPr algn="l" indent="0" marL="0">
+              <a:lnSpc>
+                <a:spcPts val="1680"/>
+              </a:lnSpc>
+              <a:spcBef>
+                <a:spcPts val="300"/>
+              </a:spcBef>
+              <a:spcAft>
+                <a:spcPts val="300"/>
+              </a:spcAft>
+              <a:buNone/>
+            </a:pPr>
+            <a:r>
+              <a:rPr lang="en-US" sz="1200" dirty="0">
+                <a:solidFill>
+                  <a:srgbClr val="1A1A1A"/>
+                </a:solidFill>
+                <a:latin typeface="Georgia" pitchFamily="34" charset="0"/>
+                <a:ea typeface="Georgia" pitchFamily="34" charset="-122"/>
+                <a:cs typeface="Georgia" pitchFamily="34" charset="-120"/>
+              </a:rPr>
+              <a:t>Senior ·  · IKS Curriculum</a:t>
+            </a:r>
+            <a:endParaRPr lang="en-US" sz="1200" dirty="0"/>
+          </a:p>
+        </p:txBody>
+      </p:sp>
+    </p:spTree>
+  </p:cSld>
+  <p:clrMapOvr>
+    <a:masterClrMapping/>
+  </p:clrMapOvr>
+</p:sld>
+</file>
+
+<file path=ppt/slides/slide15.xml><?xml version="1.0" encoding="utf-8"?>
+<p:sld xmlns:a="http://schemas.openxmlformats.org/drawingml/2006/main" xmlns:r="http://schemas.openxmlformats.org/officeDocument/2006/relationships" xmlns:p="http://schemas.openxmlformats.org/presentationml/2006/main">
+  <p:cSld name="Slide 15">
+    <p:bg>
+      <p:bgPr>
+        <a:solidFill>
+          <a:srgbClr val="FAF7F2"/>
+        </a:solidFill>
+      </p:bgPr>
+    </p:bg>
+    <p:spTree>
+      <p:nvGrpSpPr>
+        <p:cNvPr id="1" name=""/>
+        <p:cNvGrpSpPr/>
+        <p:nvPr/>
+      </p:nvGrpSpPr>
+      <p:grpSpPr>
+        <a:xfrm>
+          <a:off x="0" y="0"/>
+          <a:ext cx="0" cy="0"/>
+          <a:chOff x="0" y="0"/>
+          <a:chExt cx="0" cy="0"/>
+        </a:xfrm>
+      </p:grpSpPr>
+      <p:sp>
+        <p:nvSpPr>
+          <p:cNvPr id="2" name="Text 0"/>
+          <p:cNvSpPr/>
+          <p:nvPr/>
+        </p:nvSpPr>
+        <p:spPr>
+          <a:xfrm>
+            <a:off x="0" y="0"/>
+            <a:ext cx="9144000" cy="101501"/>
+          </a:xfrm>
+          <a:prstGeom prst="rect">
+            <a:avLst/>
+          </a:prstGeom>
+          <a:solidFill>
+            <a:srgbClr val="5D1D2E"/>
+          </a:solidFill>
+          <a:ln/>
+        </p:spPr>
+        <p:txBody>
+          <a:bodyPr wrap="square" rtlCol="0" anchor="ctr"/>
+          <a:lstStyle/>
+          <a:p>
+            <a:pPr indent="0" marL="0">
+              <a:buNone/>
+            </a:pPr>
+            <a:endParaRPr lang="en-US" dirty="0"/>
+          </a:p>
+        </p:txBody>
+      </p:sp>
+      <p:sp>
+        <p:nvSpPr>
+          <p:cNvPr id="3" name="Text 1"/>
+          <p:cNvSpPr/>
+          <p:nvPr/>
+        </p:nvSpPr>
+        <p:spPr>
+          <a:xfrm>
+            <a:off x="406301" y="457051"/>
+            <a:ext cx="8498026" cy="274290"/>
+          </a:xfrm>
+          <a:prstGeom prst="rect">
+            <a:avLst/>
+          </a:prstGeom>
+          <a:noFill/>
+          <a:ln/>
+        </p:spPr>
+        <p:txBody>
+          <a:bodyPr wrap="square" lIns="0" tIns="0" rIns="0" bIns="0" rtlCol="0" anchor="t"/>
+          <a:lstStyle/>
+          <a:p>
+            <a:pPr algn="l" indent="0" marL="0">
+              <a:lnSpc>
+                <a:spcPts val="2160"/>
+              </a:lnSpc>
+              <a:spcBef>
+                <a:spcPts val="600"/>
+              </a:spcBef>
+              <a:spcAft>
+                <a:spcPts val="800"/>
+              </a:spcAft>
+              <a:buNone/>
+            </a:pPr>
+            <a:r>
+              <a:rPr lang="en-US" sz="1800" b="1" dirty="0">
+                <a:solidFill>
+                  <a:srgbClr val="997929"/>
+                </a:solidFill>
+                <a:latin typeface="Times New Roman" pitchFamily="34" charset="0"/>
+                <a:ea typeface="Times New Roman" pitchFamily="34" charset="-122"/>
+                <a:cs typeface="Times New Roman" pitchFamily="34" charset="-120"/>
+              </a:rPr>
+              <a:t>Teacher notes</a:t>
+            </a:r>
+            <a:endParaRPr lang="en-US" sz="1800" dirty="0"/>
+          </a:p>
+        </p:txBody>
+      </p:sp>
+      <p:sp>
+        <p:nvSpPr>
+          <p:cNvPr id="4" name="Text 2"/>
+          <p:cNvSpPr/>
+          <p:nvPr/>
+        </p:nvSpPr>
+        <p:spPr>
+          <a:xfrm>
+            <a:off x="634901" y="883593"/>
+            <a:ext cx="8102798" cy="693241"/>
+          </a:xfrm>
+          <a:prstGeom prst="rect">
+            <a:avLst/>
+          </a:prstGeom>
+          <a:noFill/>
+          <a:ln/>
+        </p:spPr>
+        <p:txBody>
+          <a:bodyPr wrap="square" lIns="0" tIns="0" rIns="0" bIns="0" rtlCol="0" anchor="t"/>
+          <a:lstStyle/>
+          <a:p>
+            <a:pPr algn="l" marL="342900" indent="-342900">
+              <a:lnSpc>
+                <a:spcPts val="1620"/>
+              </a:lnSpc>
+              <a:spcAft>
+                <a:spcPts val="300"/>
+              </a:spcAft>
+              <a:buSzPct val="100000"/>
+              <a:buChar char="•"/>
+            </a:pPr>
+            <a:r>
+              <a:rPr lang="en-US" sz="1200" dirty="0">
+                <a:solidFill>
+                  <a:srgbClr val="1A1A1A"/>
+                </a:solidFill>
+                <a:latin typeface="Georgia" pitchFamily="34" charset="0"/>
+                <a:ea typeface="Georgia" pitchFamily="34" charset="-122"/>
+                <a:cs typeface="Georgia" pitchFamily="34" charset="-120"/>
+              </a:rPr>
+              <a:t>The "calculus" mapping for sūtra 9 (</a:t>
+            </a:r>
+            <a:pPr algn="l" indent="0" marL="0">
+              <a:lnSpc>
+                <a:spcPts val="1620"/>
+              </a:lnSpc>
+              <a:spcAft>
+                <a:spcPts val="300"/>
+              </a:spcAft>
+              <a:buNone/>
+            </a:pPr>
+            <a:r>
+              <a:rPr lang="en-US" sz="1200" i="1" dirty="0">
+                <a:solidFill>
+                  <a:srgbClr val="1A1A1A"/>
+                </a:solidFill>
+                <a:latin typeface="Georgia" pitchFamily="34" charset="0"/>
+                <a:ea typeface="Georgia" pitchFamily="34" charset="-122"/>
+                <a:cs typeface="Georgia" pitchFamily="34" charset="-120"/>
+              </a:rPr>
+              <a:t>Calana-Kalanābhyām</a:t>
+            </a:r>
+            <a:pPr algn="l" indent="0" marL="0">
+              <a:lnSpc>
+                <a:spcPts val="1620"/>
+              </a:lnSpc>
+              <a:spcAft>
+                <a:spcPts val="300"/>
+              </a:spcAft>
+              <a:buNone/>
+            </a:pPr>
+            <a:r>
+              <a:rPr lang="en-US" sz="1200" dirty="0">
+                <a:solidFill>
+                  <a:srgbClr val="1A1A1A"/>
+                </a:solidFill>
+                <a:latin typeface="Georgia" pitchFamily="34" charset="0"/>
+                <a:ea typeface="Georgia" pitchFamily="34" charset="-122"/>
+                <a:cs typeface="Georgia" pitchFamily="34" charset="-120"/>
+              </a:rPr>
+              <a:t>) is Tirthaji's later interpretation — Senior students may notice this is anachronistic. Acknowledge: "Tirthaji extends his sūtras' interpretation; whether all these extensions are defensible is part of the Day 6 historicity debate."</a:t>
+            </a:r>
+            <a:endParaRPr lang="en-US" sz="1200" dirty="0"/>
+          </a:p>
+        </p:txBody>
+      </p:sp>
+      <p:sp>
+        <p:nvSpPr>
+          <p:cNvPr id="5" name="Text 3"/>
+          <p:cNvSpPr/>
+          <p:nvPr/>
+        </p:nvSpPr>
+        <p:spPr>
+          <a:xfrm>
+            <a:off x="406301" y="4434929"/>
+            <a:ext cx="8498026" cy="213271"/>
+          </a:xfrm>
+          <a:prstGeom prst="rect">
+            <a:avLst/>
+          </a:prstGeom>
+          <a:noFill/>
+          <a:ln/>
+        </p:spPr>
+        <p:txBody>
+          <a:bodyPr wrap="square" lIns="0" tIns="0" rIns="0" bIns="0" rtlCol="0" anchor="t"/>
+          <a:lstStyle/>
+          <a:p>
+            <a:pPr algn="l" indent="0" marL="0">
+              <a:lnSpc>
+                <a:spcPts val="1680"/>
+              </a:lnSpc>
+              <a:spcBef>
+                <a:spcPts val="300"/>
+              </a:spcBef>
+              <a:spcAft>
+                <a:spcPts val="300"/>
+              </a:spcAft>
+              <a:buNone/>
+            </a:pPr>
+            <a:r>
+              <a:rPr lang="en-US" sz="1200" dirty="0">
+                <a:solidFill>
+                  <a:srgbClr val="1A1A1A"/>
+                </a:solidFill>
+                <a:latin typeface="Georgia" pitchFamily="34" charset="0"/>
+                <a:ea typeface="Georgia" pitchFamily="34" charset="-122"/>
+                <a:cs typeface="Georgia" pitchFamily="34" charset="-120"/>
+              </a:rPr>
+              <a:t>Senior ·  · IKS Curriculum</a:t>
+            </a:r>
+            <a:endParaRPr lang="en-US" sz="1200" dirty="0"/>
+          </a:p>
+        </p:txBody>
+      </p:sp>
+    </p:spTree>
+  </p:cSld>
+  <p:clrMapOvr>
+    <a:masterClrMapping/>
+  </p:clrMapOvr>
+</p:sld>
+</file>
+
+<file path=ppt/slides/slide16.xml><?xml version="1.0" encoding="utf-8"?>
+<p:sld xmlns:a="http://schemas.openxmlformats.org/drawingml/2006/main" xmlns:r="http://schemas.openxmlformats.org/officeDocument/2006/relationships" xmlns:p="http://schemas.openxmlformats.org/presentationml/2006/main">
+  <p:cSld name="Slide 16">
+    <p:bg>
+      <p:bgPr>
+        <a:solidFill>
+          <a:srgbClr val="FAF7F2"/>
+        </a:solidFill>
+      </p:bgPr>
+    </p:bg>
+    <p:spTree>
+      <p:nvGrpSpPr>
+        <p:cNvPr id="1" name=""/>
+        <p:cNvGrpSpPr/>
+        <p:nvPr/>
+      </p:nvGrpSpPr>
+      <p:grpSpPr>
+        <a:xfrm>
+          <a:off x="0" y="0"/>
+          <a:ext cx="0" cy="0"/>
+          <a:chOff x="0" y="0"/>
+          <a:chExt cx="0" cy="0"/>
+        </a:xfrm>
+      </p:grpSpPr>
+      <p:sp>
+        <p:nvSpPr>
+          <p:cNvPr id="2" name="Text 0"/>
+          <p:cNvSpPr/>
+          <p:nvPr/>
+        </p:nvSpPr>
+        <p:spPr>
+          <a:xfrm>
+            <a:off x="0" y="0"/>
+            <a:ext cx="9144000" cy="101501"/>
+          </a:xfrm>
+          <a:prstGeom prst="rect">
+            <a:avLst/>
+          </a:prstGeom>
+          <a:solidFill>
+            <a:srgbClr val="5D1D2E"/>
+          </a:solidFill>
+          <a:ln/>
+        </p:spPr>
+        <p:txBody>
+          <a:bodyPr wrap="square" rtlCol="0" anchor="ctr"/>
+          <a:lstStyle/>
+          <a:p>
+            <a:pPr indent="0" marL="0">
+              <a:buNone/>
+            </a:pPr>
+            <a:endParaRPr lang="en-US" dirty="0"/>
+          </a:p>
+        </p:txBody>
+      </p:sp>
+      <p:sp>
+        <p:nvSpPr>
+          <p:cNvPr id="3" name="Text 1"/>
+          <p:cNvSpPr/>
+          <p:nvPr/>
+        </p:nvSpPr>
+        <p:spPr>
+          <a:xfrm>
+            <a:off x="406301" y="457051"/>
+            <a:ext cx="8498026" cy="274290"/>
+          </a:xfrm>
+          <a:prstGeom prst="rect">
+            <a:avLst/>
+          </a:prstGeom>
+          <a:noFill/>
+          <a:ln/>
+        </p:spPr>
+        <p:txBody>
+          <a:bodyPr wrap="square" lIns="0" tIns="0" rIns="0" bIns="0" rtlCol="0" anchor="t"/>
+          <a:lstStyle/>
+          <a:p>
+            <a:pPr algn="l" indent="0" marL="0">
+              <a:lnSpc>
+                <a:spcPts val="2160"/>
+              </a:lnSpc>
+              <a:spcBef>
+                <a:spcPts val="600"/>
+              </a:spcBef>
+              <a:spcAft>
+                <a:spcPts val="800"/>
+              </a:spcAft>
+              <a:buNone/>
+            </a:pPr>
+            <a:r>
+              <a:rPr lang="en-US" sz="1800" b="1" dirty="0">
+                <a:solidFill>
+                  <a:srgbClr val="997929"/>
+                </a:solidFill>
+                <a:latin typeface="Times New Roman" pitchFamily="34" charset="0"/>
+                <a:ea typeface="Times New Roman" pitchFamily="34" charset="-122"/>
+                <a:cs typeface="Times New Roman" pitchFamily="34" charset="-120"/>
+              </a:rPr>
+              <a:t>Citation(s) used</a:t>
+            </a:r>
+            <a:endParaRPr lang="en-US" sz="1800" dirty="0"/>
+          </a:p>
+        </p:txBody>
+      </p:sp>
+      <p:sp>
+        <p:nvSpPr>
+          <p:cNvPr id="4" name="Text 2"/>
+          <p:cNvSpPr/>
+          <p:nvPr/>
+        </p:nvSpPr>
+        <p:spPr>
+          <a:xfrm>
+            <a:off x="634901" y="883593"/>
+            <a:ext cx="8102798" cy="525661"/>
+          </a:xfrm>
+          <a:prstGeom prst="rect">
+            <a:avLst/>
+          </a:prstGeom>
+          <a:noFill/>
+          <a:ln/>
+        </p:spPr>
+        <p:txBody>
+          <a:bodyPr wrap="square" lIns="0" tIns="0" rIns="0" bIns="0" rtlCol="0" anchor="t"/>
+          <a:lstStyle/>
+          <a:p>
+            <a:pPr algn="l" marL="342900" indent="-342900">
+              <a:lnSpc>
+                <a:spcPts val="1620"/>
+              </a:lnSpc>
+              <a:spcAft>
+                <a:spcPts val="300"/>
+              </a:spcAft>
+              <a:buSzPct val="100000"/>
+              <a:buChar char="•"/>
+            </a:pPr>
+            <a:r>
+              <a:rPr lang="en-US" sz="1200" dirty="0">
+                <a:solidFill>
+                  <a:srgbClr val="1A1A1A"/>
+                </a:solidFill>
+                <a:latin typeface="Georgia" pitchFamily="34" charset="0"/>
+                <a:ea typeface="Georgia" pitchFamily="34" charset="-122"/>
+                <a:cs typeface="Georgia" pitchFamily="34" charset="-120"/>
+              </a:rPr>
+              <a:t>Tirthaji (1965), sūtra list.</a:t>
+            </a:r>
+            <a:endParaRPr lang="en-US" sz="1200" dirty="0"/>
+          </a:p>
+          <a:p>
+            <a:pPr algn="l" marL="342900" indent="-342900">
+              <a:lnSpc>
+                <a:spcPts val="1620"/>
+              </a:lnSpc>
+              <a:spcAft>
+                <a:spcPts val="300"/>
+              </a:spcAft>
+              <a:buSzPct val="100000"/>
+              <a:buChar char="•"/>
+            </a:pPr>
+            <a:r>
+              <a:rPr lang="en-US" sz="1200" i="1" dirty="0">
+                <a:solidFill>
+                  <a:srgbClr val="1A1A1A"/>
+                </a:solidFill>
+                <a:latin typeface="Georgia" pitchFamily="34" charset="0"/>
+                <a:ea typeface="Georgia" pitchFamily="34" charset="-122"/>
+                <a:cs typeface="Georgia" pitchFamily="34" charset="-120"/>
+              </a:rPr>
+              <a:t>Microsoft Word - sutras1.pdf</a:t>
+            </a:r>
+            <a:pPr algn="l" indent="0" marL="0">
+              <a:lnSpc>
+                <a:spcPts val="1620"/>
+              </a:lnSpc>
+              <a:spcAft>
+                <a:spcPts val="300"/>
+              </a:spcAft>
+              <a:buNone/>
+            </a:pPr>
+            <a:r>
+              <a:rPr lang="en-US" sz="1200" dirty="0">
+                <a:solidFill>
+                  <a:srgbClr val="1A1A1A"/>
+                </a:solidFill>
+                <a:latin typeface="Georgia" pitchFamily="34" charset="0"/>
+                <a:ea typeface="Georgia" pitchFamily="34" charset="-122"/>
+                <a:cs typeface="Georgia" pitchFamily="34" charset="-120"/>
+              </a:rPr>
+              <a:t> in SutraGanita content.</a:t>
+            </a:r>
+            <a:endParaRPr lang="en-US" sz="1200" dirty="0"/>
+          </a:p>
+        </p:txBody>
+      </p:sp>
+      <p:sp>
+        <p:nvSpPr>
+          <p:cNvPr id="5" name="Text 3"/>
           <p:cNvSpPr/>
           <p:nvPr/>
         </p:nvSpPr>
@@ -2027,7 +4450,7 @@
                 <a:ea typeface="Times New Roman" pitchFamily="34" charset="-122"/>
                 <a:cs typeface="Times New Roman" pitchFamily="34" charset="-120"/>
               </a:rPr>
-              <a:t>Materials</a:t>
+              <a:t>Learning objective</a:t>
             </a:r>
             <a:endParaRPr lang="en-US" sz="1800" dirty="0"/>
           </a:p>
@@ -2075,7 +4498,7 @@
                 <a:ea typeface="Georgia" pitchFamily="34" charset="-122"/>
                 <a:cs typeface="Georgia" pitchFamily="34" charset="-120"/>
               </a:rPr>
-              <a:t>– Printed table: all 16 + 13 sūtras with English translations</a:t>
+              <a:t>Students name all 16 Tirthaji sūtras + 13 sub-sūtras and gloss the meaning of at least 5.</a:t>
             </a:r>
             <a:endParaRPr lang="en-US" sz="1200" dirty="0"/>
           </a:p>
@@ -2084,72 +4507,6 @@
       <p:sp>
         <p:nvSpPr>
           <p:cNvPr id="5" name="Text 3"/>
-          <p:cNvSpPr/>
-          <p:nvPr/>
-        </p:nvSpPr>
-        <p:spPr>
-          <a:xfrm>
-            <a:off x="634901" y="1173063"/>
-            <a:ext cx="8102798" cy="300930"/>
-          </a:xfrm>
-          <a:prstGeom prst="rect">
-            <a:avLst/>
-          </a:prstGeom>
-          <a:noFill/>
-          <a:ln/>
-        </p:spPr>
-        <p:txBody>
-          <a:bodyPr wrap="square" lIns="0" tIns="0" rIns="0" bIns="0" rtlCol="0" anchor="t"/>
-          <a:lstStyle/>
-          <a:p>
-            <a:pPr algn="l" marL="342900" indent="-342900">
-              <a:lnSpc>
-                <a:spcPts val="1620"/>
-              </a:lnSpc>
-              <a:spcAft>
-                <a:spcPts val="300"/>
-              </a:spcAft>
-              <a:buSzPct val="100000"/>
-              <a:buChar char="•"/>
-            </a:pPr>
-            <a:r>
-              <a:rPr lang="en-US" sz="1200" dirty="0">
-                <a:solidFill>
-                  <a:srgbClr val="1A1A1A"/>
-                </a:solidFill>
-                <a:latin typeface="Georgia" pitchFamily="34" charset="0"/>
-                <a:ea typeface="Georgia" pitchFamily="34" charset="-122"/>
-                <a:cs typeface="Georgia" pitchFamily="34" charset="-120"/>
-              </a:rPr>
-              <a:t>Microsoft Word - sutras1.pdf</a:t>
-            </a:r>
-            <a:pPr algn="l" indent="0" marL="0">
-              <a:lnSpc>
-                <a:spcPts val="1620"/>
-              </a:lnSpc>
-              <a:spcAft>
-                <a:spcPts val="300"/>
-              </a:spcAft>
-              <a:buNone/>
-            </a:pPr>
-            <a:r>
-              <a:rPr lang="en-US" sz="1200" dirty="0">
-                <a:solidFill>
-                  <a:srgbClr val="1A1A1A"/>
-                </a:solidFill>
-                <a:latin typeface="Georgia" pitchFamily="34" charset="0"/>
-                <a:ea typeface="Georgia" pitchFamily="34" charset="-122"/>
-                <a:cs typeface="Georgia" pitchFamily="34" charset="-120"/>
-              </a:rPr>
-              <a:t> reference</a:t>
-            </a:r>
-            <a:endParaRPr lang="en-US" sz="1200" dirty="0"/>
-          </a:p>
-        </p:txBody>
-      </p:sp>
-      <p:sp>
-        <p:nvSpPr>
-          <p:cNvPr id="6" name="Text 4"/>
           <p:cNvSpPr/>
           <p:nvPr/>
         </p:nvSpPr>
@@ -2299,7 +4656,7 @@
                 <a:ea typeface="Times New Roman" pitchFamily="34" charset="-122"/>
                 <a:cs typeface="Times New Roman" pitchFamily="34" charset="-120"/>
               </a:rPr>
-              <a:t>Flow</a:t>
+              <a:t>Materials</a:t>
             </a:r>
             <a:endParaRPr lang="en-US" sz="1800" dirty="0"/>
           </a:p>
@@ -2308,6 +4665,96 @@
       <p:sp>
         <p:nvSpPr>
           <p:cNvPr id="4" name="Text 2"/>
+          <p:cNvSpPr/>
+          <p:nvPr/>
+        </p:nvSpPr>
+        <p:spPr>
+          <a:xfrm>
+            <a:off x="634901" y="883593"/>
+            <a:ext cx="8102798" cy="544711"/>
+          </a:xfrm>
+          <a:prstGeom prst="rect">
+            <a:avLst/>
+          </a:prstGeom>
+          <a:noFill/>
+          <a:ln/>
+        </p:spPr>
+        <p:txBody>
+          <a:bodyPr wrap="square" lIns="0" tIns="0" rIns="0" bIns="0" rtlCol="0" anchor="t"/>
+          <a:lstStyle/>
+          <a:p>
+            <a:pPr algn="l" marL="342900" indent="-342900">
+              <a:lnSpc>
+                <a:spcPts val="1620"/>
+              </a:lnSpc>
+              <a:spcAft>
+                <a:spcPts val="300"/>
+              </a:spcAft>
+              <a:buSzPct val="100000"/>
+              <a:buChar char="•"/>
+            </a:pPr>
+            <a:r>
+              <a:rPr lang="en-US" sz="1200" dirty="0">
+                <a:solidFill>
+                  <a:srgbClr val="1A1A1A"/>
+                </a:solidFill>
+                <a:latin typeface="Georgia" pitchFamily="34" charset="0"/>
+                <a:ea typeface="Georgia" pitchFamily="34" charset="-122"/>
+                <a:cs typeface="Georgia" pitchFamily="34" charset="-120"/>
+              </a:rPr>
+              <a:t>Printed table: all 16 + 13 sūtras with English translations</a:t>
+            </a:r>
+            <a:endParaRPr lang="en-US" sz="1200" dirty="0"/>
+          </a:p>
+          <a:p>
+            <a:pPr algn="l" marL="342900" indent="-342900">
+              <a:lnSpc>
+                <a:spcPts val="1620"/>
+              </a:lnSpc>
+              <a:spcAft>
+                <a:spcPts val="300"/>
+              </a:spcAft>
+              <a:buSzPct val="100000"/>
+              <a:buChar char="•"/>
+            </a:pPr>
+            <a:r>
+              <a:rPr lang="en-US" sz="1200" dirty="0">
+                <a:solidFill>
+                  <a:srgbClr val="1A1A1A"/>
+                </a:solidFill>
+                <a:latin typeface="Georgia" pitchFamily="34" charset="0"/>
+                <a:ea typeface="Georgia" pitchFamily="34" charset="-122"/>
+                <a:cs typeface="Georgia" pitchFamily="34" charset="-120"/>
+              </a:rPr>
+              <a:t>Microsoft Word - sutras1.pdf</a:t>
+            </a:r>
+            <a:pPr algn="l" indent="0" marL="0">
+              <a:lnSpc>
+                <a:spcPts val="1620"/>
+              </a:lnSpc>
+              <a:spcAft>
+                <a:spcPts val="300"/>
+              </a:spcAft>
+              <a:buNone/>
+            </a:pPr>
+            <a:r>
+              <a:rPr lang="en-US" sz="1200" dirty="0">
+                <a:solidFill>
+                  <a:srgbClr val="1A1A1A"/>
+                </a:solidFill>
+                <a:latin typeface="Georgia" pitchFamily="34" charset="0"/>
+                <a:ea typeface="Georgia" pitchFamily="34" charset="-122"/>
+                <a:cs typeface="Georgia" pitchFamily="34" charset="-120"/>
+              </a:rPr>
+              <a:t> reference</a:t>
+            </a:r>
+            <a:endParaRPr lang="en-US" sz="1200" dirty="0"/>
+          </a:p>
+        </p:txBody>
+      </p:sp>
+      <p:sp>
+        <p:nvSpPr>
+          <p:cNvPr id="5" name="Text 3"/>
           <p:cNvSpPr/>
           <p:nvPr/>
         </p:nvSpPr>
@@ -2457,7 +4904,7 @@
                 <a:ea typeface="Times New Roman" pitchFamily="34" charset="-122"/>
                 <a:cs typeface="Times New Roman" pitchFamily="34" charset="-120"/>
               </a:rPr>
-              <a:t>Warm-up (5 min)</a:t>
+              <a:t>Flow</a:t>
             </a:r>
             <a:endParaRPr lang="en-US" sz="1800" dirty="0"/>
           </a:p>
@@ -2466,54 +4913,6 @@
       <p:sp>
         <p:nvSpPr>
           <p:cNvPr id="4" name="Text 2"/>
-          <p:cNvSpPr/>
-          <p:nvPr/>
-        </p:nvSpPr>
-        <p:spPr>
-          <a:xfrm>
-            <a:off x="406301" y="870942"/>
-            <a:ext cx="8498026" cy="213271"/>
-          </a:xfrm>
-          <a:prstGeom prst="rect">
-            <a:avLst/>
-          </a:prstGeom>
-          <a:noFill/>
-          <a:ln/>
-        </p:spPr>
-        <p:txBody>
-          <a:bodyPr wrap="square" lIns="0" tIns="0" rIns="0" bIns="0" rtlCol="0" anchor="t"/>
-          <a:lstStyle/>
-          <a:p>
-            <a:pPr algn="l" indent="0" marL="0">
-              <a:lnSpc>
-                <a:spcPts val="1680"/>
-              </a:lnSpc>
-              <a:spcBef>
-                <a:spcPts val="300"/>
-              </a:spcBef>
-              <a:spcAft>
-                <a:spcPts val="300"/>
-              </a:spcAft>
-              <a:buNone/>
-            </a:pPr>
-            <a:r>
-              <a:rPr lang="en-US" sz="1200" dirty="0">
-                <a:solidFill>
-                  <a:srgbClr val="1A1A1A"/>
-                </a:solidFill>
-                <a:latin typeface="Georgia" pitchFamily="34" charset="0"/>
-                <a:ea typeface="Georgia" pitchFamily="34" charset="-122"/>
-                <a:cs typeface="Georgia" pitchFamily="34" charset="-120"/>
-              </a:rPr>
-              <a:t>– Recall from Day 1: how many sūtras? (16 + 13 sub-sūtras.)</a:t>
-            </a:r>
-            <a:endParaRPr lang="en-US" sz="1200" dirty="0"/>
-          </a:p>
-        </p:txBody>
-      </p:sp>
-      <p:sp>
-        <p:nvSpPr>
-          <p:cNvPr id="5" name="Text 3"/>
           <p:cNvSpPr/>
           <p:nvPr/>
         </p:nvSpPr>
@@ -2663,7 +5062,7 @@
                 <a:ea typeface="Times New Roman" pitchFamily="34" charset="-122"/>
                 <a:cs typeface="Times New Roman" pitchFamily="34" charset="-120"/>
               </a:rPr>
-              <a:t>Sūtra-recall quiz (10 min)</a:t>
+              <a:t>Warm-up (5 min)</a:t>
             </a:r>
             <a:endParaRPr lang="en-US" sz="1800" dirty="0"/>
           </a:p>
@@ -2677,8 +5076,8 @@
         </p:nvSpPr>
         <p:spPr>
           <a:xfrm>
-            <a:off x="406301" y="870942"/>
-            <a:ext cx="8498026" cy="426541"/>
+            <a:off x="634901" y="883593"/>
+            <a:ext cx="8102798" cy="281880"/>
           </a:xfrm>
           <a:prstGeom prst="rect">
             <a:avLst/>
@@ -2690,17 +5089,15 @@
           <a:bodyPr wrap="square" lIns="0" tIns="0" rIns="0" bIns="0" rtlCol="0" anchor="t"/>
           <a:lstStyle/>
           <a:p>
-            <a:pPr algn="l" indent="0" marL="0">
-              <a:lnSpc>
-                <a:spcPts val="1680"/>
-              </a:lnSpc>
-              <a:spcBef>
-                <a:spcPts val="300"/>
-              </a:spcBef>
-              <a:spcAft>
-                <a:spcPts val="300"/>
-              </a:spcAft>
-              <a:buNone/>
+            <a:pPr algn="l" marL="342900" indent="-342900">
+              <a:lnSpc>
+                <a:spcPts val="1620"/>
+              </a:lnSpc>
+              <a:spcAft>
+                <a:spcPts val="300"/>
+              </a:spcAft>
+              <a:buSzPct val="100000"/>
+              <a:buChar char="•"/>
             </a:pPr>
             <a:r>
               <a:rPr lang="en-US" sz="1200" dirty="0">
@@ -2711,7 +5108,7 @@
                 <a:ea typeface="Georgia" pitchFamily="34" charset="-122"/>
                 <a:cs typeface="Georgia" pitchFamily="34" charset="-120"/>
               </a:rPr>
-              <a:t>– 8 single-mark questions on the back of the worksheet:   – Match 6 sūtras to their English meanings.   - "Which sūtra means 'vertically and crosswise'?"   - "Which 2 sūtras are most relevant to addition?"</a:t>
+              <a:t>Recall from Day 1: how many sūtras? (16 + 13 sub-sūtras.)</a:t>
             </a:r>
             <a:endParaRPr lang="en-US" sz="1200" dirty="0"/>
           </a:p>
@@ -2869,7 +5266,7 @@
                 <a:ea typeface="Times New Roman" pitchFamily="34" charset="-122"/>
                 <a:cs typeface="Times New Roman" pitchFamily="34" charset="-120"/>
               </a:rPr>
-              <a:t>Wrap-up (5 min)</a:t>
+              <a:t>Core (25 min)</a:t>
             </a:r>
             <a:endParaRPr lang="en-US" sz="1800" dirty="0"/>
           </a:p>
@@ -2883,8 +5280,8 @@
         </p:nvSpPr>
         <p:spPr>
           <a:xfrm>
-            <a:off x="406301" y="870942"/>
-            <a:ext cx="8498026" cy="213271"/>
+            <a:off x="634901" y="883593"/>
+            <a:ext cx="8102798" cy="281880"/>
           </a:xfrm>
           <a:prstGeom prst="rect">
             <a:avLst/>
@@ -2896,6 +5293,52 @@
           <a:bodyPr wrap="square" lIns="0" tIns="0" rIns="0" bIns="0" rtlCol="0" anchor="t"/>
           <a:lstStyle/>
           <a:p>
+            <a:pPr algn="l" marL="342900" indent="-342900">
+              <a:lnSpc>
+                <a:spcPts val="1620"/>
+              </a:lnSpc>
+              <a:spcAft>
+                <a:spcPts val="300"/>
+              </a:spcAft>
+              <a:buSzPct val="100000"/>
+              <a:buChar char="•"/>
+            </a:pPr>
+            <a:r>
+              <a:rPr lang="en-US" sz="1200" b="1" dirty="0">
+                <a:solidFill>
+                  <a:srgbClr val="1A1A1A"/>
+                </a:solidFill>
+                <a:latin typeface="Georgia" pitchFamily="34" charset="0"/>
+                <a:ea typeface="Georgia" pitchFamily="34" charset="-122"/>
+                <a:cs typeface="Georgia" pitchFamily="34" charset="-120"/>
+              </a:rPr>
+              <a:t>Walk through the 16 sūtras with translations:</a:t>
+            </a:r>
+            <a:endParaRPr lang="en-US" sz="1200" dirty="0"/>
+          </a:p>
+        </p:txBody>
+      </p:sp>
+      <p:sp>
+        <p:nvSpPr>
+          <p:cNvPr id="5" name="Text 3"/>
+          <p:cNvSpPr/>
+          <p:nvPr/>
+        </p:nvSpPr>
+        <p:spPr>
+          <a:xfrm>
+            <a:off x="406301" y="1254323"/>
+            <a:ext cx="8498026" cy="213271"/>
+          </a:xfrm>
+          <a:prstGeom prst="rect">
+            <a:avLst/>
+          </a:prstGeom>
+          <a:noFill/>
+          <a:ln/>
+        </p:spPr>
+        <p:txBody>
+          <a:bodyPr wrap="square" lIns="0" tIns="0" rIns="0" bIns="0" rtlCol="0" anchor="t"/>
+          <a:lstStyle/>
+          <a:p>
             <a:pPr algn="l" indent="0" marL="0">
               <a:lnSpc>
                 <a:spcPts val="1680"/>
@@ -2909,29 +5352,6 @@
               <a:buNone/>
             </a:pPr>
             <a:r>
-              <a:rPr lang="en-US" sz="1200" dirty="0">
-                <a:solidFill>
-                  <a:srgbClr val="1A1A1A"/>
-                </a:solidFill>
-                <a:latin typeface="Georgia" pitchFamily="34" charset="0"/>
-                <a:ea typeface="Georgia" pitchFamily="34" charset="-122"/>
-                <a:cs typeface="Georgia" pitchFamily="34" charset="-120"/>
-              </a:rPr>
-              <a:t>– Preview Day 3: </a:t>
-            </a:r>
-            <a:pPr algn="l" indent="0" marL="0">
-              <a:lnSpc>
-                <a:spcPts val="1680"/>
-              </a:lnSpc>
-              <a:spcBef>
-                <a:spcPts val="300"/>
-              </a:spcBef>
-              <a:spcAft>
-                <a:spcPts val="300"/>
-              </a:spcAft>
-              <a:buNone/>
-            </a:pPr>
-            <a:r>
               <a:rPr lang="en-US" sz="1200" i="1" dirty="0">
                 <a:solidFill>
                   <a:srgbClr val="1A1A1A"/>
@@ -2940,7 +5360,7 @@
                 <a:ea typeface="Georgia" pitchFamily="34" charset="-122"/>
                 <a:cs typeface="Georgia" pitchFamily="34" charset="-120"/>
               </a:rPr>
-              <a:t>"Tomorrow — full dot-method at Senior level. 5-digit × 5-addend, sub-60-second target."</a:t>
+              <a:t>Each row: # · Sanskrit · English · Domain.</a:t>
             </a:r>
             <a:endParaRPr lang="en-US" sz="1200" dirty="0"/>
           </a:p>
@@ -2948,7 +5368,7 @@
       </p:sp>
       <p:sp>
         <p:nvSpPr>
-          <p:cNvPr id="5" name="Text 3"/>
+          <p:cNvPr id="6" name="Text 4"/>
           <p:cNvSpPr/>
           <p:nvPr/>
         </p:nvSpPr>
@@ -3098,7 +5518,7 @@
                 <a:ea typeface="Times New Roman" pitchFamily="34" charset="-122"/>
                 <a:cs typeface="Times New Roman" pitchFamily="34" charset="-120"/>
               </a:rPr>
-              <a:t>Differentiation</a:t>
+              <a:t>Core (25 min) (cont.)</a:t>
             </a:r>
             <a:endParaRPr lang="en-US" sz="1800" dirty="0"/>
           </a:p>
@@ -3113,7 +5533,7 @@
         <p:spPr>
           <a:xfrm>
             <a:off x="634901" y="883593"/>
-            <a:ext cx="8102798" cy="731341"/>
+            <a:ext cx="8102798" cy="1500783"/>
           </a:xfrm>
           <a:prstGeom prst="rect">
             <a:avLst/>
@@ -3144,7 +5564,7 @@
                 <a:ea typeface="Georgia" pitchFamily="34" charset="-122"/>
                 <a:cs typeface="Georgia" pitchFamily="34" charset="-120"/>
               </a:rPr>
-              <a:t>Tier up:</a:t>
+              <a:t>1</a:t>
             </a:r>
             <a:pPr algn="l" indent="0" marL="0">
               <a:lnSpc>
@@ -3164,47 +5584,7 @@
                 <a:ea typeface="Georgia" pitchFamily="34" charset="-122"/>
                 <a:cs typeface="Georgia" pitchFamily="34" charset="-120"/>
               </a:rPr>
-              <a:t> Pick a sūtra (say, </a:t>
-            </a:r>
-            <a:pPr algn="l" indent="0" marL="0">
-              <a:lnSpc>
-                <a:spcPts val="1620"/>
-              </a:lnSpc>
-              <a:spcAft>
-                <a:spcPts val="300"/>
-              </a:spcAft>
-              <a:buNone/>
-            </a:pPr>
-            <a:r>
-              <a:rPr lang="en-US" sz="1200" i="1" dirty="0">
-                <a:solidFill>
-                  <a:srgbClr val="1A1A1A"/>
-                </a:solidFill>
-                <a:latin typeface="Georgia" pitchFamily="34" charset="0"/>
-                <a:ea typeface="Georgia" pitchFamily="34" charset="-122"/>
-                <a:cs typeface="Georgia" pitchFamily="34" charset="-120"/>
-              </a:rPr>
-              <a:t>Ūrdhva-Tiryagbhyām</a:t>
-            </a:r>
-            <a:pPr algn="l" indent="0" marL="0">
-              <a:lnSpc>
-                <a:spcPts val="1620"/>
-              </a:lnSpc>
-              <a:spcAft>
-                <a:spcPts val="300"/>
-              </a:spcAft>
-              <a:buNone/>
-            </a:pPr>
-            <a:r>
-              <a:rPr lang="en-US" sz="1200" dirty="0">
-                <a:solidFill>
-                  <a:srgbClr val="1A1A1A"/>
-                </a:solidFill>
-                <a:latin typeface="Georgia" pitchFamily="34" charset="0"/>
-                <a:ea typeface="Georgia" pitchFamily="34" charset="-122"/>
-                <a:cs typeface="Georgia" pitchFamily="34" charset="-120"/>
-              </a:rPr>
-              <a:t>) and look up its multiplication application. Bring a worked example on Day 4.</a:t>
+              <a:t> — Ekādhikena Pūrveṇa · "By one more than the previous" · Multiplication, division</a:t>
             </a:r>
             <a:endParaRPr lang="en-US" sz="1200" dirty="0"/>
           </a:p>
@@ -3228,7 +5608,7 @@
                 <a:ea typeface="Georgia" pitchFamily="34" charset="-122"/>
                 <a:cs typeface="Georgia" pitchFamily="34" charset="-120"/>
               </a:rPr>
-              <a:t>Tier down:</a:t>
+              <a:t>2</a:t>
             </a:r>
             <a:pPr algn="l" indent="0" marL="0">
               <a:lnSpc>
@@ -3248,7 +5628,183 @@
                 <a:ea typeface="Georgia" pitchFamily="34" charset="-122"/>
                 <a:cs typeface="Georgia" pitchFamily="34" charset="-120"/>
               </a:rPr>
-              <a:t> Focus on memorising the names of sūtras 1, 2, 3, 7, 8 — the most commonly used.</a:t>
+              <a:t> — Nikhilam Navataścaramaṁ Daśataḥ · "All from 9, last from 10" · Subtraction, multiplication</a:t>
+            </a:r>
+            <a:endParaRPr lang="en-US" sz="1200" dirty="0"/>
+          </a:p>
+          <a:p>
+            <a:pPr algn="l" marL="342900" indent="-342900">
+              <a:lnSpc>
+                <a:spcPts val="1620"/>
+              </a:lnSpc>
+              <a:spcAft>
+                <a:spcPts val="300"/>
+              </a:spcAft>
+              <a:buSzPct val="100000"/>
+              <a:buChar char="•"/>
+            </a:pPr>
+            <a:r>
+              <a:rPr lang="en-US" sz="1200" b="1" dirty="0">
+                <a:solidFill>
+                  <a:srgbClr val="1A1A1A"/>
+                </a:solidFill>
+                <a:latin typeface="Georgia" pitchFamily="34" charset="0"/>
+                <a:ea typeface="Georgia" pitchFamily="34" charset="-122"/>
+                <a:cs typeface="Georgia" pitchFamily="34" charset="-120"/>
+              </a:rPr>
+              <a:t>3</a:t>
+            </a:r>
+            <a:pPr algn="l" indent="0" marL="0">
+              <a:lnSpc>
+                <a:spcPts val="1620"/>
+              </a:lnSpc>
+              <a:spcAft>
+                <a:spcPts val="300"/>
+              </a:spcAft>
+              <a:buNone/>
+            </a:pPr>
+            <a:r>
+              <a:rPr lang="en-US" sz="1200" dirty="0">
+                <a:solidFill>
+                  <a:srgbClr val="1A1A1A"/>
+                </a:solidFill>
+                <a:latin typeface="Georgia" pitchFamily="34" charset="0"/>
+                <a:ea typeface="Georgia" pitchFamily="34" charset="-122"/>
+                <a:cs typeface="Georgia" pitchFamily="34" charset="-120"/>
+              </a:rPr>
+              <a:t> — Ūrdhva-Tiryagbhyāṁ · "Vertically and crosswise" · General multiplication</a:t>
+            </a:r>
+            <a:endParaRPr lang="en-US" sz="1200" dirty="0"/>
+          </a:p>
+          <a:p>
+            <a:pPr algn="l" marL="342900" indent="-342900">
+              <a:lnSpc>
+                <a:spcPts val="1620"/>
+              </a:lnSpc>
+              <a:spcAft>
+                <a:spcPts val="300"/>
+              </a:spcAft>
+              <a:buSzPct val="100000"/>
+              <a:buChar char="•"/>
+            </a:pPr>
+            <a:r>
+              <a:rPr lang="en-US" sz="1200" b="1" dirty="0">
+                <a:solidFill>
+                  <a:srgbClr val="1A1A1A"/>
+                </a:solidFill>
+                <a:latin typeface="Georgia" pitchFamily="34" charset="0"/>
+                <a:ea typeface="Georgia" pitchFamily="34" charset="-122"/>
+                <a:cs typeface="Georgia" pitchFamily="34" charset="-120"/>
+              </a:rPr>
+              <a:t>4</a:t>
+            </a:r>
+            <a:pPr algn="l" indent="0" marL="0">
+              <a:lnSpc>
+                <a:spcPts val="1620"/>
+              </a:lnSpc>
+              <a:spcAft>
+                <a:spcPts val="300"/>
+              </a:spcAft>
+              <a:buNone/>
+            </a:pPr>
+            <a:r>
+              <a:rPr lang="en-US" sz="1200" dirty="0">
+                <a:solidFill>
+                  <a:srgbClr val="1A1A1A"/>
+                </a:solidFill>
+                <a:latin typeface="Georgia" pitchFamily="34" charset="0"/>
+                <a:ea typeface="Georgia" pitchFamily="34" charset="-122"/>
+                <a:cs typeface="Georgia" pitchFamily="34" charset="-120"/>
+              </a:rPr>
+              <a:t> — Parāvartya Yojayet · "Transpose and apply" · Division</a:t>
+            </a:r>
+            <a:endParaRPr lang="en-US" sz="1200" dirty="0"/>
+          </a:p>
+          <a:p>
+            <a:pPr algn="l" marL="342900" indent="-342900">
+              <a:lnSpc>
+                <a:spcPts val="1620"/>
+              </a:lnSpc>
+              <a:spcAft>
+                <a:spcPts val="300"/>
+              </a:spcAft>
+              <a:buSzPct val="100000"/>
+              <a:buChar char="•"/>
+            </a:pPr>
+            <a:r>
+              <a:rPr lang="en-US" sz="1200" b="1" dirty="0">
+                <a:solidFill>
+                  <a:srgbClr val="1A1A1A"/>
+                </a:solidFill>
+                <a:latin typeface="Georgia" pitchFamily="34" charset="0"/>
+                <a:ea typeface="Georgia" pitchFamily="34" charset="-122"/>
+                <a:cs typeface="Georgia" pitchFamily="34" charset="-120"/>
+              </a:rPr>
+              <a:t>5</a:t>
+            </a:r>
+            <a:pPr algn="l" indent="0" marL="0">
+              <a:lnSpc>
+                <a:spcPts val="1620"/>
+              </a:lnSpc>
+              <a:spcAft>
+                <a:spcPts val="300"/>
+              </a:spcAft>
+              <a:buNone/>
+            </a:pPr>
+            <a:r>
+              <a:rPr lang="en-US" sz="1200" dirty="0">
+                <a:solidFill>
+                  <a:srgbClr val="1A1A1A"/>
+                </a:solidFill>
+                <a:latin typeface="Georgia" pitchFamily="34" charset="0"/>
+                <a:ea typeface="Georgia" pitchFamily="34" charset="-122"/>
+                <a:cs typeface="Georgia" pitchFamily="34" charset="-120"/>
+              </a:rPr>
+              <a:t> — Śūnyaṁ Sāmyasamuccaye · "When the sum is the same, that sum is zero" · Equations</a:t>
+            </a:r>
+            <a:endParaRPr lang="en-US" sz="1200" dirty="0"/>
+          </a:p>
+          <a:p>
+            <a:pPr algn="l" marL="342900" indent="-342900">
+              <a:lnSpc>
+                <a:spcPts val="1620"/>
+              </a:lnSpc>
+              <a:spcAft>
+                <a:spcPts val="300"/>
+              </a:spcAft>
+              <a:buSzPct val="100000"/>
+              <a:buChar char="•"/>
+            </a:pPr>
+            <a:r>
+              <a:rPr lang="en-US" sz="1200" b="1" dirty="0">
+                <a:solidFill>
+                  <a:srgbClr val="1A1A1A"/>
+                </a:solidFill>
+                <a:latin typeface="Georgia" pitchFamily="34" charset="0"/>
+                <a:ea typeface="Georgia" pitchFamily="34" charset="-122"/>
+                <a:cs typeface="Georgia" pitchFamily="34" charset="-120"/>
+              </a:rPr>
+              <a:t>6</a:t>
+            </a:r>
+            <a:pPr algn="l" indent="0" marL="0">
+              <a:lnSpc>
+                <a:spcPts val="1620"/>
+              </a:lnSpc>
+              <a:spcAft>
+                <a:spcPts val="300"/>
+              </a:spcAft>
+              <a:buNone/>
+            </a:pPr>
+            <a:r>
+              <a:rPr lang="en-US" sz="1200" dirty="0">
+                <a:solidFill>
+                  <a:srgbClr val="1A1A1A"/>
+                </a:solidFill>
+                <a:latin typeface="Georgia" pitchFamily="34" charset="0"/>
+                <a:ea typeface="Georgia" pitchFamily="34" charset="-122"/>
+                <a:cs typeface="Georgia" pitchFamily="34" charset="-120"/>
+              </a:rPr>
+              <a:t> — (Ānurūpye) Śūnyam Anyat · "If one is in ratio, the other is zero" · Equations</a:t>
             </a:r>
             <a:endParaRPr lang="en-US" sz="1200" dirty="0"/>
           </a:p>
@@ -3406,7 +5962,7 @@
                 <a:ea typeface="Times New Roman" pitchFamily="34" charset="-122"/>
                 <a:cs typeface="Times New Roman" pitchFamily="34" charset="-120"/>
               </a:rPr>
-              <a:t>Teacher notes</a:t>
+              <a:t>Core (25 min) (cont.)</a:t>
             </a:r>
             <a:endParaRPr lang="en-US" sz="1800" dirty="0"/>
           </a:p>
@@ -3420,8 +5976,8 @@
         </p:nvSpPr>
         <p:spPr>
           <a:xfrm>
-            <a:off x="406301" y="870942"/>
-            <a:ext cx="8498026" cy="639812"/>
+            <a:off x="634901" y="883593"/>
+            <a:ext cx="8102798" cy="1500783"/>
           </a:xfrm>
           <a:prstGeom prst="rect">
             <a:avLst/>
@@ -3433,13 +5989,31 @@
           <a:bodyPr wrap="square" lIns="0" tIns="0" rIns="0" bIns="0" rtlCol="0" anchor="t"/>
           <a:lstStyle/>
           <a:p>
+            <a:pPr algn="l" marL="342900" indent="-342900">
+              <a:lnSpc>
+                <a:spcPts val="1620"/>
+              </a:lnSpc>
+              <a:spcAft>
+                <a:spcPts val="300"/>
+              </a:spcAft>
+              <a:buSzPct val="100000"/>
+              <a:buChar char="•"/>
+            </a:pPr>
+            <a:r>
+              <a:rPr lang="en-US" sz="1200" b="1" dirty="0">
+                <a:solidFill>
+                  <a:srgbClr val="1A1A1A"/>
+                </a:solidFill>
+                <a:latin typeface="Georgia" pitchFamily="34" charset="0"/>
+                <a:ea typeface="Georgia" pitchFamily="34" charset="-122"/>
+                <a:cs typeface="Georgia" pitchFamily="34" charset="-120"/>
+              </a:rPr>
+              <a:t>7</a:t>
+            </a:r>
             <a:pPr algn="l" indent="0" marL="0">
               <a:lnSpc>
-                <a:spcPts val="1680"/>
-              </a:lnSpc>
-              <a:spcBef>
-                <a:spcPts val="300"/>
-              </a:spcBef>
+                <a:spcPts val="1620"/>
+              </a:lnSpc>
               <a:spcAft>
                 <a:spcPts val="300"/>
               </a:spcAft>
@@ -3454,38 +6028,80 @@
                 <a:ea typeface="Georgia" pitchFamily="34" charset="-122"/>
                 <a:cs typeface="Georgia" pitchFamily="34" charset="-120"/>
               </a:rPr>
-              <a:t>– The "calculus" mapping for sūtra 9 (</a:t>
+              <a:t> — Sankalana Vyavakalanābhyām · "By addition and by subtraction" · Equations, mental math</a:t>
+            </a:r>
+            <a:endParaRPr lang="en-US" sz="1200" dirty="0"/>
+          </a:p>
+          <a:p>
+            <a:pPr algn="l" marL="342900" indent="-342900">
+              <a:lnSpc>
+                <a:spcPts val="1620"/>
+              </a:lnSpc>
+              <a:spcAft>
+                <a:spcPts val="300"/>
+              </a:spcAft>
+              <a:buSzPct val="100000"/>
+              <a:buChar char="•"/>
+            </a:pPr>
+            <a:r>
+              <a:rPr lang="en-US" sz="1200" b="1" dirty="0">
+                <a:solidFill>
+                  <a:srgbClr val="1A1A1A"/>
+                </a:solidFill>
+                <a:latin typeface="Georgia" pitchFamily="34" charset="0"/>
+                <a:ea typeface="Georgia" pitchFamily="34" charset="-122"/>
+                <a:cs typeface="Georgia" pitchFamily="34" charset="-120"/>
+              </a:rPr>
+              <a:t>8</a:t>
             </a:r>
             <a:pPr algn="l" indent="0" marL="0">
               <a:lnSpc>
-                <a:spcPts val="1680"/>
-              </a:lnSpc>
-              <a:spcBef>
-                <a:spcPts val="300"/>
-              </a:spcBef>
-              <a:spcAft>
-                <a:spcPts val="300"/>
-              </a:spcAft>
-              <a:buNone/>
-            </a:pPr>
-            <a:r>
-              <a:rPr lang="en-US" sz="1200" i="1" dirty="0">
-                <a:solidFill>
-                  <a:srgbClr val="1A1A1A"/>
-                </a:solidFill>
-                <a:latin typeface="Georgia" pitchFamily="34" charset="0"/>
-                <a:ea typeface="Georgia" pitchFamily="34" charset="-122"/>
-                <a:cs typeface="Georgia" pitchFamily="34" charset="-120"/>
-              </a:rPr>
-              <a:t>Calana-Kalanābhyām</a:t>
+                <a:spcPts val="1620"/>
+              </a:lnSpc>
+              <a:spcAft>
+                <a:spcPts val="300"/>
+              </a:spcAft>
+              <a:buNone/>
+            </a:pPr>
+            <a:r>
+              <a:rPr lang="en-US" sz="1200" dirty="0">
+                <a:solidFill>
+                  <a:srgbClr val="1A1A1A"/>
+                </a:solidFill>
+                <a:latin typeface="Georgia" pitchFamily="34" charset="0"/>
+                <a:ea typeface="Georgia" pitchFamily="34" charset="-122"/>
+                <a:cs typeface="Georgia" pitchFamily="34" charset="-120"/>
+              </a:rPr>
+              <a:t> — Pūraṇāpūraṇābhyām · "By completing or non-completing" · Equations, mental math</a:t>
+            </a:r>
+            <a:endParaRPr lang="en-US" sz="1200" dirty="0"/>
+          </a:p>
+          <a:p>
+            <a:pPr algn="l" marL="342900" indent="-342900">
+              <a:lnSpc>
+                <a:spcPts val="1620"/>
+              </a:lnSpc>
+              <a:spcAft>
+                <a:spcPts val="300"/>
+              </a:spcAft>
+              <a:buSzPct val="100000"/>
+              <a:buChar char="•"/>
+            </a:pPr>
+            <a:r>
+              <a:rPr lang="en-US" sz="1200" b="1" dirty="0">
+                <a:solidFill>
+                  <a:srgbClr val="1A1A1A"/>
+                </a:solidFill>
+                <a:latin typeface="Georgia" pitchFamily="34" charset="0"/>
+                <a:ea typeface="Georgia" pitchFamily="34" charset="-122"/>
+                <a:cs typeface="Georgia" pitchFamily="34" charset="-120"/>
+              </a:rPr>
+              <a:t>9</a:t>
             </a:r>
             <a:pPr algn="l" indent="0" marL="0">
               <a:lnSpc>
-                <a:spcPts val="1680"/>
-              </a:lnSpc>
-              <a:spcBef>
-                <a:spcPts val="300"/>
-              </a:spcBef>
+                <a:spcPts val="1620"/>
+              </a:lnSpc>
               <a:spcAft>
                 <a:spcPts val="300"/>
               </a:spcAft>
@@ -3500,7 +6116,139 @@
                 <a:ea typeface="Georgia" pitchFamily="34" charset="-122"/>
                 <a:cs typeface="Georgia" pitchFamily="34" charset="-120"/>
               </a:rPr>
-              <a:t>) is Tirthaji's later interpretation — Senior students may notice this is anachronistic. Acknowledge: "Tirthaji extends his sūtras' interpretation; whether all these extensions are defensible is part of the Day 6 historicity debate."</a:t>
+              <a:t> — Calana-Kalanābhyām · "By differentiation and integration" · Calculus (modern interpretation)</a:t>
+            </a:r>
+            <a:endParaRPr lang="en-US" sz="1200" dirty="0"/>
+          </a:p>
+          <a:p>
+            <a:pPr algn="l" marL="342900" indent="-342900">
+              <a:lnSpc>
+                <a:spcPts val="1620"/>
+              </a:lnSpc>
+              <a:spcAft>
+                <a:spcPts val="300"/>
+              </a:spcAft>
+              <a:buSzPct val="100000"/>
+              <a:buChar char="•"/>
+            </a:pPr>
+            <a:r>
+              <a:rPr lang="en-US" sz="1200" b="1" dirty="0">
+                <a:solidFill>
+                  <a:srgbClr val="1A1A1A"/>
+                </a:solidFill>
+                <a:latin typeface="Georgia" pitchFamily="34" charset="0"/>
+                <a:ea typeface="Georgia" pitchFamily="34" charset="-122"/>
+                <a:cs typeface="Georgia" pitchFamily="34" charset="-120"/>
+              </a:rPr>
+              <a:t>10</a:t>
+            </a:r>
+            <a:pPr algn="l" indent="0" marL="0">
+              <a:lnSpc>
+                <a:spcPts val="1620"/>
+              </a:lnSpc>
+              <a:spcAft>
+                <a:spcPts val="300"/>
+              </a:spcAft>
+              <a:buNone/>
+            </a:pPr>
+            <a:r>
+              <a:rPr lang="en-US" sz="1200" dirty="0">
+                <a:solidFill>
+                  <a:srgbClr val="1A1A1A"/>
+                </a:solidFill>
+                <a:latin typeface="Georgia" pitchFamily="34" charset="0"/>
+                <a:ea typeface="Georgia" pitchFamily="34" charset="-122"/>
+                <a:cs typeface="Georgia" pitchFamily="34" charset="-120"/>
+              </a:rPr>
+              <a:t> — Yāvadūnam · "Whatever the extent of its deficiency" · Squaring near a base</a:t>
+            </a:r>
+            <a:endParaRPr lang="en-US" sz="1200" dirty="0"/>
+          </a:p>
+          <a:p>
+            <a:pPr algn="l" marL="342900" indent="-342900">
+              <a:lnSpc>
+                <a:spcPts val="1620"/>
+              </a:lnSpc>
+              <a:spcAft>
+                <a:spcPts val="300"/>
+              </a:spcAft>
+              <a:buSzPct val="100000"/>
+              <a:buChar char="•"/>
+            </a:pPr>
+            <a:r>
+              <a:rPr lang="en-US" sz="1200" b="1" dirty="0">
+                <a:solidFill>
+                  <a:srgbClr val="1A1A1A"/>
+                </a:solidFill>
+                <a:latin typeface="Georgia" pitchFamily="34" charset="0"/>
+                <a:ea typeface="Georgia" pitchFamily="34" charset="-122"/>
+                <a:cs typeface="Georgia" pitchFamily="34" charset="-120"/>
+              </a:rPr>
+              <a:t>11</a:t>
+            </a:r>
+            <a:pPr algn="l" indent="0" marL="0">
+              <a:lnSpc>
+                <a:spcPts val="1620"/>
+              </a:lnSpc>
+              <a:spcAft>
+                <a:spcPts val="300"/>
+              </a:spcAft>
+              <a:buNone/>
+            </a:pPr>
+            <a:r>
+              <a:rPr lang="en-US" sz="1200" dirty="0">
+                <a:solidFill>
+                  <a:srgbClr val="1A1A1A"/>
+                </a:solidFill>
+                <a:latin typeface="Georgia" pitchFamily="34" charset="0"/>
+                <a:ea typeface="Georgia" pitchFamily="34" charset="-122"/>
+                <a:cs typeface="Georgia" pitchFamily="34" charset="-120"/>
+              </a:rPr>
+              <a:t> — Vyaṣṭi-Samaṣṭiḥ · "Specific and general" · —</a:t>
+            </a:r>
+            <a:endParaRPr lang="en-US" sz="1200" dirty="0"/>
+          </a:p>
+          <a:p>
+            <a:pPr algn="l" marL="342900" indent="-342900">
+              <a:lnSpc>
+                <a:spcPts val="1620"/>
+              </a:lnSpc>
+              <a:spcAft>
+                <a:spcPts val="300"/>
+              </a:spcAft>
+              <a:buSzPct val="100000"/>
+              <a:buChar char="•"/>
+            </a:pPr>
+            <a:r>
+              <a:rPr lang="en-US" sz="1200" b="1" dirty="0">
+                <a:solidFill>
+                  <a:srgbClr val="1A1A1A"/>
+                </a:solidFill>
+                <a:latin typeface="Georgia" pitchFamily="34" charset="0"/>
+                <a:ea typeface="Georgia" pitchFamily="34" charset="-122"/>
+                <a:cs typeface="Georgia" pitchFamily="34" charset="-120"/>
+              </a:rPr>
+              <a:t>12</a:t>
+            </a:r>
+            <a:pPr algn="l" indent="0" marL="0">
+              <a:lnSpc>
+                <a:spcPts val="1620"/>
+              </a:lnSpc>
+              <a:spcAft>
+                <a:spcPts val="300"/>
+              </a:spcAft>
+              <a:buNone/>
+            </a:pPr>
+            <a:r>
+              <a:rPr lang="en-US" sz="1200" dirty="0">
+                <a:solidFill>
+                  <a:srgbClr val="1A1A1A"/>
+                </a:solidFill>
+                <a:latin typeface="Georgia" pitchFamily="34" charset="0"/>
+                <a:ea typeface="Georgia" pitchFamily="34" charset="-122"/>
+                <a:cs typeface="Georgia" pitchFamily="34" charset="-120"/>
+              </a:rPr>
+              <a:t> — Śeṣānyaṅkena Caramena · "The remainders by the last digit" · Division</a:t>
             </a:r>
             <a:endParaRPr lang="en-US" sz="1200" dirty="0"/>
           </a:p>
@@ -3658,7 +6406,7 @@
                 <a:ea typeface="Times New Roman" pitchFamily="34" charset="-122"/>
                 <a:cs typeface="Times New Roman" pitchFamily="34" charset="-120"/>
               </a:rPr>
-              <a:t>Citation(s) used</a:t>
+              <a:t>Core (25 min) (cont.)</a:t>
             </a:r>
             <a:endParaRPr lang="en-US" sz="1800" dirty="0"/>
           </a:p>
@@ -3672,8 +6420,8 @@
         </p:nvSpPr>
         <p:spPr>
           <a:xfrm>
-            <a:off x="406301" y="870942"/>
-            <a:ext cx="8498026" cy="213271"/>
+            <a:off x="634901" y="883593"/>
+            <a:ext cx="8102798" cy="1013222"/>
           </a:xfrm>
           <a:prstGeom prst="rect">
             <a:avLst/>
@@ -3685,54 +6433,6 @@
           <a:bodyPr wrap="square" lIns="0" tIns="0" rIns="0" bIns="0" rtlCol="0" anchor="t"/>
           <a:lstStyle/>
           <a:p>
-            <a:pPr algn="l" indent="0" marL="0">
-              <a:lnSpc>
-                <a:spcPts val="1680"/>
-              </a:lnSpc>
-              <a:spcBef>
-                <a:spcPts val="300"/>
-              </a:spcBef>
-              <a:spcAft>
-                <a:spcPts val="300"/>
-              </a:spcAft>
-              <a:buNone/>
-            </a:pPr>
-            <a:r>
-              <a:rPr lang="en-US" sz="1200" dirty="0">
-                <a:solidFill>
-                  <a:srgbClr val="1A1A1A"/>
-                </a:solidFill>
-                <a:latin typeface="Georgia" pitchFamily="34" charset="0"/>
-                <a:ea typeface="Georgia" pitchFamily="34" charset="-122"/>
-                <a:cs typeface="Georgia" pitchFamily="34" charset="-120"/>
-              </a:rPr>
-              <a:t>– Tirthaji (1965), sūtra list.</a:t>
-            </a:r>
-            <a:endParaRPr lang="en-US" sz="1200" dirty="0"/>
-          </a:p>
-        </p:txBody>
-      </p:sp>
-      <p:sp>
-        <p:nvSpPr>
-          <p:cNvPr id="5" name="Text 3"/>
-          <p:cNvSpPr/>
-          <p:nvPr/>
-        </p:nvSpPr>
-        <p:spPr>
-          <a:xfrm>
-            <a:off x="634901" y="1173063"/>
-            <a:ext cx="8102798" cy="281880"/>
-          </a:xfrm>
-          <a:prstGeom prst="rect">
-            <a:avLst/>
-          </a:prstGeom>
-          <a:noFill/>
-          <a:ln/>
-        </p:spPr>
-        <p:txBody>
-          <a:bodyPr wrap="square" lIns="0" tIns="0" rIns="0" bIns="0" rtlCol="0" anchor="t"/>
-          <a:lstStyle/>
-          <a:p>
             <a:pPr algn="l" marL="342900" indent="-342900">
               <a:lnSpc>
                 <a:spcPts val="1620"/>
@@ -3744,15 +6444,15 @@
               <a:buChar char="•"/>
             </a:pPr>
             <a:r>
-              <a:rPr lang="en-US" sz="1200" i="1" dirty="0">
-                <a:solidFill>
-                  <a:srgbClr val="1A1A1A"/>
-                </a:solidFill>
-                <a:latin typeface="Georgia" pitchFamily="34" charset="0"/>
-                <a:ea typeface="Georgia" pitchFamily="34" charset="-122"/>
-                <a:cs typeface="Georgia" pitchFamily="34" charset="-120"/>
-              </a:rPr>
-              <a:t>Microsoft Word - sutras1.pdf</a:t>
+              <a:rPr lang="en-US" sz="1200" b="1" dirty="0">
+                <a:solidFill>
+                  <a:srgbClr val="1A1A1A"/>
+                </a:solidFill>
+                <a:latin typeface="Georgia" pitchFamily="34" charset="0"/>
+                <a:ea typeface="Georgia" pitchFamily="34" charset="-122"/>
+                <a:cs typeface="Georgia" pitchFamily="34" charset="-120"/>
+              </a:rPr>
+              <a:t>13</a:t>
             </a:r>
             <a:pPr algn="l" indent="0" marL="0">
               <a:lnSpc>
@@ -3772,15 +6472,147 @@
                 <a:ea typeface="Georgia" pitchFamily="34" charset="-122"/>
                 <a:cs typeface="Georgia" pitchFamily="34" charset="-120"/>
               </a:rPr>
-              <a:t> in SutraGanita content.</a:t>
+              <a:t> — Sopāntya-dvayam Antyam · "The penultimate and the last" · —</a:t>
             </a:r>
             <a:endParaRPr lang="en-US" sz="1200" dirty="0"/>
           </a:p>
-        </p:txBody>
-      </p:sp>
-      <p:sp>
-        <p:nvSpPr>
-          <p:cNvPr id="6" name="Text 4"/>
+          <a:p>
+            <a:pPr algn="l" marL="342900" indent="-342900">
+              <a:lnSpc>
+                <a:spcPts val="1620"/>
+              </a:lnSpc>
+              <a:spcAft>
+                <a:spcPts val="300"/>
+              </a:spcAft>
+              <a:buSzPct val="100000"/>
+              <a:buChar char="•"/>
+            </a:pPr>
+            <a:r>
+              <a:rPr lang="en-US" sz="1200" b="1" dirty="0">
+                <a:solidFill>
+                  <a:srgbClr val="1A1A1A"/>
+                </a:solidFill>
+                <a:latin typeface="Georgia" pitchFamily="34" charset="0"/>
+                <a:ea typeface="Georgia" pitchFamily="34" charset="-122"/>
+                <a:cs typeface="Georgia" pitchFamily="34" charset="-120"/>
+              </a:rPr>
+              <a:t>14</a:t>
+            </a:r>
+            <a:pPr algn="l" indent="0" marL="0">
+              <a:lnSpc>
+                <a:spcPts val="1620"/>
+              </a:lnSpc>
+              <a:spcAft>
+                <a:spcPts val="300"/>
+              </a:spcAft>
+              <a:buNone/>
+            </a:pPr>
+            <a:r>
+              <a:rPr lang="en-US" sz="1200" dirty="0">
+                <a:solidFill>
+                  <a:srgbClr val="1A1A1A"/>
+                </a:solidFill>
+                <a:latin typeface="Georgia" pitchFamily="34" charset="0"/>
+                <a:ea typeface="Georgia" pitchFamily="34" charset="-122"/>
+                <a:cs typeface="Georgia" pitchFamily="34" charset="-120"/>
+              </a:rPr>
+              <a:t> — Ekanyūnena Pūrveṇa · "By one less than the previous" · Multiplication by 9, 99, etc.</a:t>
+            </a:r>
+            <a:endParaRPr lang="en-US" sz="1200" dirty="0"/>
+          </a:p>
+          <a:p>
+            <a:pPr algn="l" marL="342900" indent="-342900">
+              <a:lnSpc>
+                <a:spcPts val="1620"/>
+              </a:lnSpc>
+              <a:spcAft>
+                <a:spcPts val="300"/>
+              </a:spcAft>
+              <a:buSzPct val="100000"/>
+              <a:buChar char="•"/>
+            </a:pPr>
+            <a:r>
+              <a:rPr lang="en-US" sz="1200" b="1" dirty="0">
+                <a:solidFill>
+                  <a:srgbClr val="1A1A1A"/>
+                </a:solidFill>
+                <a:latin typeface="Georgia" pitchFamily="34" charset="0"/>
+                <a:ea typeface="Georgia" pitchFamily="34" charset="-122"/>
+                <a:cs typeface="Georgia" pitchFamily="34" charset="-120"/>
+              </a:rPr>
+              <a:t>15</a:t>
+            </a:r>
+            <a:pPr algn="l" indent="0" marL="0">
+              <a:lnSpc>
+                <a:spcPts val="1620"/>
+              </a:lnSpc>
+              <a:spcAft>
+                <a:spcPts val="300"/>
+              </a:spcAft>
+              <a:buNone/>
+            </a:pPr>
+            <a:r>
+              <a:rPr lang="en-US" sz="1200" dirty="0">
+                <a:solidFill>
+                  <a:srgbClr val="1A1A1A"/>
+                </a:solidFill>
+                <a:latin typeface="Georgia" pitchFamily="34" charset="0"/>
+                <a:ea typeface="Georgia" pitchFamily="34" charset="-122"/>
+                <a:cs typeface="Georgia" pitchFamily="34" charset="-120"/>
+              </a:rPr>
+              <a:t> — Guṇitasamuccayaḥ · "The product of the sum is the sum of the products" · —</a:t>
+            </a:r>
+            <a:endParaRPr lang="en-US" sz="1200" dirty="0"/>
+          </a:p>
+          <a:p>
+            <a:pPr algn="l" marL="342900" indent="-342900">
+              <a:lnSpc>
+                <a:spcPts val="1620"/>
+              </a:lnSpc>
+              <a:spcAft>
+                <a:spcPts val="300"/>
+              </a:spcAft>
+              <a:buSzPct val="100000"/>
+              <a:buChar char="•"/>
+            </a:pPr>
+            <a:r>
+              <a:rPr lang="en-US" sz="1200" b="1" dirty="0">
+                <a:solidFill>
+                  <a:srgbClr val="1A1A1A"/>
+                </a:solidFill>
+                <a:latin typeface="Georgia" pitchFamily="34" charset="0"/>
+                <a:ea typeface="Georgia" pitchFamily="34" charset="-122"/>
+                <a:cs typeface="Georgia" pitchFamily="34" charset="-120"/>
+              </a:rPr>
+              <a:t>16</a:t>
+            </a:r>
+            <a:pPr algn="l" indent="0" marL="0">
+              <a:lnSpc>
+                <a:spcPts val="1620"/>
+              </a:lnSpc>
+              <a:spcAft>
+                <a:spcPts val="300"/>
+              </a:spcAft>
+              <a:buNone/>
+            </a:pPr>
+            <a:r>
+              <a:rPr lang="en-US" sz="1200" dirty="0">
+                <a:solidFill>
+                  <a:srgbClr val="1A1A1A"/>
+                </a:solidFill>
+                <a:latin typeface="Georgia" pitchFamily="34" charset="0"/>
+                <a:ea typeface="Georgia" pitchFamily="34" charset="-122"/>
+                <a:cs typeface="Georgia" pitchFamily="34" charset="-120"/>
+              </a:rPr>
+              <a:t> — Guṇaka Samuccayaḥ · "All the multipliers" · —</a:t>
+            </a:r>
+            <a:endParaRPr lang="en-US" sz="1200" dirty="0"/>
+          </a:p>
+        </p:txBody>
+      </p:sp>
+      <p:sp>
+        <p:nvSpPr>
+          <p:cNvPr id="5" name="Text 3"/>
           <p:cNvSpPr/>
           <p:nvPr/>
         </p:nvSpPr>
